--- a/aspire-dashboard-13-5-concise.pptx
+++ b/aspire-dashboard-13-5-concise.pptx
@@ -23,6 +23,7 @@
     <p:sldId id="271" r:id="rId17"/>
     <p:sldId id="272" r:id="rId18"/>
     <p:sldId id="273" r:id="rId19"/>
+    <p:sldId id="288" r:id="rId39"/>
     <p:sldId id="274" r:id="rId20"/>
     <p:sldId id="275" r:id="rId21"/>
     <p:sldId id="276" r:id="rId22"/>
@@ -2789,6 +2790,76 @@
         <p14:creationId xmlns:p14="http://schemas.microsoft.com/office/powerpoint/2010/main" val="1024086991"/>
       </p:ext>
     </p:extLst>
+  </p:cSld>
+  <p:clrMapOvr>
+    <a:masterClrMapping/>
+  </p:clrMapOvr>
+</p:notes>
+</file>
+
+<file path=ppt/notesSlides/notesSlide33.xml><?xml version="1.0" encoding="utf-8"?>
+<p:notes xmlns:a="http://schemas.openxmlformats.org/drawingml/2006/main" xmlns:p="http://schemas.openxmlformats.org/presentationml/2006/main" xmlns:r="http://schemas.openxmlformats.org/officeDocument/2006/relationships">
+  <p:cSld>
+    <p:spTree>
+      <p:nvGrpSpPr>
+        <p:cNvPr id="1" name=""/>
+        <p:cNvGrpSpPr/>
+        <p:nvPr/>
+      </p:nvGrpSpPr>
+      <p:grpSpPr>
+        <a:xfrm>
+          <a:off x="0" y="0"/>
+          <a:ext cx="0" cy="0"/>
+          <a:chOff x="0" y="0"/>
+          <a:chExt cx="0" cy="0"/>
+        </a:xfrm>
+      </p:grpSpPr>
+      <p:sp>
+        <p:nvSpPr>
+          <p:cNvPr id="2" name="Slide Image Placeholder 1"/>
+          <p:cNvSpPr>
+            <a:spLocks noGrp="1"/>
+          </p:cNvSpPr>
+          <p:nvPr>
+            <p:ph type="sldImg" idx="2"/>
+          </p:nvPr>
+        </p:nvSpPr>
+        <p:spPr/>
+      </p:sp>
+      <p:sp>
+        <p:nvSpPr>
+          <p:cNvPr id="3" name="Notes Placeholder 2"/>
+          <p:cNvSpPr>
+            <a:spLocks noGrp="1"/>
+          </p:cNvSpPr>
+          <p:nvPr>
+            <p:ph type="body" idx="3" sz="quarter"/>
+          </p:nvPr>
+        </p:nvSpPr>
+        <p:spPr/>
+        <p:txBody>
+          <a:bodyPr/>
+          <a:lstStyle/>
+          <a:p>
+            <a:r>
+              <a:t>Code from the BingoBoard demo AppHost (apphost.cs lines 68-70) and its producerconsole.cs. AddCSharpApp runs a C# file-based app; experimental, ASPIRECSHARPAPPS001, .NET 10 SDK. Docs: https://aspire.dev/integrations/dotnet/csharp-file-based-apps/. WaitFor(admin) holds the console until admin is up.</a:t>
+            </a:r>
+          </a:p>
+        </p:txBody>
+      </p:sp>
+      <p:sp>
+        <p:nvSpPr>
+          <p:cNvPr id="4" name="Slide Number Placeholder 3"/>
+          <p:cNvSpPr>
+            <a:spLocks noGrp="1"/>
+          </p:cNvSpPr>
+          <p:nvPr>
+            <p:ph type="sldNum" idx="5" sz="quarter"/>
+          </p:nvPr>
+        </p:nvSpPr>
+        <p:spPr/>
+      </p:sp>
+    </p:spTree>
   </p:cSld>
   <p:clrMapOvr>
     <a:masterClrMapping/>
@@ -14288,7 +14359,7 @@
 
 <file path=ppt/slides/slide19.xml><?xml version="1.0" encoding="utf-8"?>
 <p:sld xmlns:a="http://schemas.openxmlformats.org/drawingml/2006/main" xmlns:r="http://schemas.openxmlformats.org/officeDocument/2006/relationships" xmlns:p="http://schemas.openxmlformats.org/presentationml/2006/main">
-  <p:cSld name="Slide 19">
+  <p:cSld name="Slide 20">
     <p:spTree>
       <p:nvGrpSpPr>
         <p:cNvPr id="1" name=""/>
@@ -14338,9 +14409,1978 @@
                 <a:ea typeface="Cambria" pitchFamily="34" charset="-122"/>
                 <a:cs typeface="Cambria" pitchFamily="34" charset="-120"/>
               </a:rPr>
-              <a:t>Terminal view</a:t>
+              <a:t>C# file app with a terminal</a:t>
             </a:r>
             <a:endParaRPr lang="en-US" sz="3400" dirty="0"/>
+          </a:p>
+        </p:txBody>
+      </p:sp>
+      <p:sp>
+        <p:nvSpPr>
+          <p:cNvPr id="3" name="Terminal TS panel"/>
+          <p:cNvSpPr/>
+          <p:nvPr/>
+        </p:nvSpPr>
+        <p:spPr>
+          <a:xfrm>
+            <a:off x="548640" y="1325880"/>
+            <a:ext cx="6949440" cy="1463040"/>
+          </a:xfrm>
+          <a:prstGeom prst="roundRect">
+            <a:avLst>
+              <a:gd name="adj" fmla="val 2353"/>
+            </a:avLst>
+          </a:prstGeom>
+          <a:solidFill>
+            <a:srgbClr val="1C1830"/>
+          </a:solidFill>
+          <a:ln w="12700">
+            <a:solidFill>
+              <a:srgbClr val="1C1830"/>
+            </a:solidFill>
+            <a:prstDash val="solid"/>
+          </a:ln>
+        </p:spPr>
+        <p:txBody>
+          <a:bodyPr/>
+          <a:p/>
+        </p:txBody>
+      </p:sp>
+      <p:sp>
+        <p:nvSpPr>
+          <p:cNvPr id="4" name="Terminal TS label"/>
+          <p:cNvSpPr txBox="1"/>
+          <p:nvPr/>
+        </p:nvSpPr>
+        <p:spPr>
+          <a:xfrm>
+            <a:off x="777240" y="1417320"/>
+            <a:ext cx="6492240" cy="274320"/>
+          </a:xfrm>
+          <a:prstGeom prst="rect">
+            <a:avLst/>
+          </a:prstGeom>
+          <a:noFill/>
+          <a:ln/>
+        </p:spPr>
+        <p:txBody>
+          <a:bodyPr wrap="square" lIns="0" tIns="0" rIns="0" bIns="0" rtlCol="0" anchor="ctr"/>
+          <a:lstStyle/>
+          <a:p>
+            <a:pPr indent="0" marL="0">
+              <a:buNone/>
+            </a:pPr>
+            <a:r>
+              <a:rPr lang="en-US" sz="1000" b="1" spc="100" kern="0" dirty="0">
+                <a:solidFill>
+                  <a:srgbClr val="8B87A3"/>
+                </a:solidFill>
+                <a:latin typeface="Calibri" pitchFamily="34" charset="0"/>
+                <a:ea typeface="Calibri" pitchFamily="34" charset="-122"/>
+                <a:cs typeface="Calibri" pitchFamily="34" charset="-120"/>
+              </a:rPr>
+              <a:t>C#  ·  apphost.cs  (excerpt)</a:t>
+            </a:r>
+            <a:endParaRPr lang="en-US" sz="1000" dirty="0"/>
+          </a:p>
+        </p:txBody>
+      </p:sp>
+      <p:sp>
+        <p:nvSpPr>
+          <p:cNvPr id="5" name="Terminal TS text"/>
+          <p:cNvSpPr txBox="1"/>
+          <p:nvPr/>
+        </p:nvSpPr>
+        <p:spPr>
+          <a:xfrm>
+            <a:off x="777240" y="1737360"/>
+            <a:ext cx="6492240" cy="1280160"/>
+          </a:xfrm>
+          <a:prstGeom prst="rect">
+            <a:avLst/>
+          </a:prstGeom>
+          <a:noFill/>
+          <a:ln/>
+        </p:spPr>
+        <p:txBody>
+          <a:bodyPr wrap="square" lIns="0" tIns="0" rIns="0" bIns="0" rtlCol="0" anchor="t"/>
+          <a:lstStyle/>
+          <a:p>
+            <a:pPr indent="0" marL="0">
+              <a:buNone/>
+            </a:pPr>
+            <a:pPr indent="0" marL="0">
+              <a:buNone/>
+            </a:pPr>
+            <a:pPr indent="0" marL="0">
+              <a:buNone/>
+            </a:pPr>
+            <a:pPr indent="0" marL="0">
+              <a:buNone/>
+            </a:pPr>
+            <a:pPr indent="0" marL="0">
+              <a:buNone/>
+            </a:pPr>
+            <a:pPr indent="0" marL="0">
+              <a:buNone/>
+            </a:pPr>
+            <a:pPr indent="0" marL="0">
+              <a:buNone/>
+            </a:pPr>
+            <a:pPr indent="0" marL="0">
+              <a:buNone/>
+            </a:pPr>
+            <a:r>
+              <a:rPr lang="en-US" sz="1050" dirty="0" i="1">
+                <a:solidFill>
+                  <a:srgbClr val="8B87A3"/>
+                </a:solidFill>
+                <a:latin typeface="Courier New" pitchFamily="34" charset="0"/>
+                <a:ea typeface="Courier New" pitchFamily="34" charset="-122"/>
+                <a:cs typeface="Courier New" pitchFamily="34" charset="-120"/>
+              </a:rPr>
+              <a:t>#pragma warning disable ASPIRECSHARPAPPS001, ASPIRETERMINAL001</a:t>
+            </a:r>
+          </a:p>
+          <a:p>
+            <a:pPr indent="0" marL="0">
+              <a:buNone/>
+            </a:pPr>
+            <a:pPr indent="0" marL="0">
+              <a:buNone/>
+            </a:pPr>
+            <a:pPr indent="0" marL="0">
+              <a:buNone/>
+            </a:pPr>
+            <a:pPr indent="0" marL="0">
+              <a:buNone/>
+            </a:pPr>
+            <a:pPr indent="0" marL="0">
+              <a:buNone/>
+            </a:pPr>
+            <a:pPr indent="0" marL="0">
+              <a:buNone/>
+            </a:pPr>
+            <a:pPr indent="0" marL="0">
+              <a:buNone/>
+            </a:pPr>
+            <a:pPr indent="0" marL="0">
+              <a:buNone/>
+            </a:pPr>
+            <a:r>
+              <a:rPr lang="en-US" sz="1050" dirty="0" i="0">
+                <a:solidFill>
+                  <a:srgbClr val="E8E6F0"/>
+                </a:solidFill>
+                <a:latin typeface="Courier New" pitchFamily="34" charset="0"/>
+                <a:ea typeface="Courier New" pitchFamily="34" charset="-122"/>
+                <a:cs typeface="Courier New" pitchFamily="34" charset="-120"/>
+              </a:rPr>
+              <a:t> </a:t>
+            </a:r>
+          </a:p>
+          <a:p>
+            <a:pPr indent="0" marL="0">
+              <a:buNone/>
+            </a:pPr>
+            <a:pPr indent="0" marL="0">
+              <a:buNone/>
+            </a:pPr>
+            <a:pPr indent="0" marL="0">
+              <a:buNone/>
+            </a:pPr>
+            <a:pPr indent="0" marL="0">
+              <a:buNone/>
+            </a:pPr>
+            <a:pPr indent="0" marL="0">
+              <a:buNone/>
+            </a:pPr>
+            <a:pPr indent="0" marL="0">
+              <a:buNone/>
+            </a:pPr>
+            <a:pPr indent="0" marL="0">
+              <a:buNone/>
+            </a:pPr>
+            <a:pPr indent="0" marL="0">
+              <a:buNone/>
+            </a:pPr>
+            <a:r>
+              <a:rPr lang="en-US" sz="1050" dirty="0" i="0">
+                <a:solidFill>
+                  <a:srgbClr val="E8E6F0"/>
+                </a:solidFill>
+                <a:latin typeface="Courier New" pitchFamily="34" charset="0"/>
+                <a:ea typeface="Courier New" pitchFamily="34" charset="-122"/>
+                <a:cs typeface="Courier New" pitchFamily="34" charset="-120"/>
+              </a:rPr>
+              <a:t>builder</a:t>
+            </a:r>
+            <a:r>
+              <a:rPr lang="en-US" sz="1050" dirty="0" i="0">
+                <a:solidFill>
+                  <a:srgbClr val="E8E6F0"/>
+                </a:solidFill>
+                <a:latin typeface="Courier New" pitchFamily="34" charset="0"/>
+                <a:ea typeface="Courier New" pitchFamily="34" charset="-122"/>
+                <a:cs typeface="Courier New" pitchFamily="34" charset="-120"/>
+              </a:rPr>
+              <a:t>.</a:t>
+            </a:r>
+            <a:r>
+              <a:rPr lang="en-US" sz="1050" dirty="0" i="0">
+                <a:solidFill>
+                  <a:srgbClr val="E8E6F0"/>
+                </a:solidFill>
+                <a:latin typeface="Courier New" pitchFamily="34" charset="0"/>
+                <a:ea typeface="Courier New" pitchFamily="34" charset="-122"/>
+                <a:cs typeface="Courier New" pitchFamily="34" charset="-120"/>
+              </a:rPr>
+              <a:t>AddCSharpApp</a:t>
+            </a:r>
+            <a:r>
+              <a:rPr lang="en-US" sz="1050" dirty="0" i="0">
+                <a:solidFill>
+                  <a:srgbClr val="E8E6F0"/>
+                </a:solidFill>
+                <a:latin typeface="Courier New" pitchFamily="34" charset="0"/>
+                <a:ea typeface="Courier New" pitchFamily="34" charset="-122"/>
+                <a:cs typeface="Courier New" pitchFamily="34" charset="-120"/>
+              </a:rPr>
+              <a:t>(</a:t>
+            </a:r>
+            <a:r>
+              <a:rPr lang="en-US" sz="1050" dirty="0" i="0">
+                <a:solidFill>
+                  <a:srgbClr val="8FE3B0"/>
+                </a:solidFill>
+                <a:latin typeface="Courier New" pitchFamily="34" charset="0"/>
+                <a:ea typeface="Courier New" pitchFamily="34" charset="-122"/>
+                <a:cs typeface="Courier New" pitchFamily="34" charset="-120"/>
+              </a:rPr>
+              <a:t>"producer-console"</a:t>
+            </a:r>
+            <a:r>
+              <a:rPr lang="en-US" sz="1050" dirty="0" i="0">
+                <a:solidFill>
+                  <a:srgbClr val="E8E6F0"/>
+                </a:solidFill>
+                <a:latin typeface="Courier New" pitchFamily="34" charset="0"/>
+                <a:ea typeface="Courier New" pitchFamily="34" charset="-122"/>
+                <a:cs typeface="Courier New" pitchFamily="34" charset="-120"/>
+              </a:rPr>
+              <a:t>,</a:t>
+            </a:r>
+            <a:r>
+              <a:rPr lang="en-US" sz="1050" dirty="0" i="0">
+                <a:solidFill>
+                  <a:srgbClr val="E8E6F0"/>
+                </a:solidFill>
+                <a:latin typeface="Courier New" pitchFamily="34" charset="0"/>
+                <a:ea typeface="Courier New" pitchFamily="34" charset="-122"/>
+                <a:cs typeface="Courier New" pitchFamily="34" charset="-120"/>
+              </a:rPr>
+              <a:t> </a:t>
+            </a:r>
+            <a:r>
+              <a:rPr lang="en-US" sz="1050" dirty="0" i="0">
+                <a:solidFill>
+                  <a:srgbClr val="8FE3B0"/>
+                </a:solidFill>
+                <a:latin typeface="Courier New" pitchFamily="34" charset="0"/>
+                <a:ea typeface="Courier New" pitchFamily="34" charset="-122"/>
+                <a:cs typeface="Courier New" pitchFamily="34" charset="-120"/>
+              </a:rPr>
+              <a:t>"./producerconsole.cs"</a:t>
+            </a:r>
+            <a:r>
+              <a:rPr lang="en-US" sz="1050" dirty="0" i="0">
+                <a:solidFill>
+                  <a:srgbClr val="E8E6F0"/>
+                </a:solidFill>
+                <a:latin typeface="Courier New" pitchFamily="34" charset="0"/>
+                <a:ea typeface="Courier New" pitchFamily="34" charset="-122"/>
+                <a:cs typeface="Courier New" pitchFamily="34" charset="-120"/>
+              </a:rPr>
+              <a:t>)</a:t>
+            </a:r>
+          </a:p>
+          <a:p>
+            <a:pPr indent="0" marL="0">
+              <a:buNone/>
+            </a:pPr>
+            <a:pPr indent="0" marL="0">
+              <a:buNone/>
+            </a:pPr>
+            <a:pPr indent="0" marL="0">
+              <a:buNone/>
+            </a:pPr>
+            <a:pPr indent="0" marL="0">
+              <a:buNone/>
+            </a:pPr>
+            <a:pPr indent="0" marL="0">
+              <a:buNone/>
+            </a:pPr>
+            <a:pPr indent="0" marL="0">
+              <a:buNone/>
+            </a:pPr>
+            <a:pPr indent="0" marL="0">
+              <a:buNone/>
+            </a:pPr>
+            <a:pPr indent="0" marL="0">
+              <a:buNone/>
+            </a:pPr>
+            <a:r>
+              <a:rPr lang="en-US" sz="1050" dirty="0" i="0">
+                <a:solidFill>
+                  <a:srgbClr val="E8E6F0"/>
+                </a:solidFill>
+                <a:latin typeface="Courier New" pitchFamily="34" charset="0"/>
+                <a:ea typeface="Courier New" pitchFamily="34" charset="-122"/>
+                <a:cs typeface="Courier New" pitchFamily="34" charset="-120"/>
+              </a:rPr>
+              <a:t>    </a:t>
+            </a:r>
+            <a:r>
+              <a:rPr lang="en-US" sz="1050" dirty="0" i="0">
+                <a:solidFill>
+                  <a:srgbClr val="E8E6F0"/>
+                </a:solidFill>
+                <a:latin typeface="Courier New" pitchFamily="34" charset="0"/>
+                <a:ea typeface="Courier New" pitchFamily="34" charset="-122"/>
+                <a:cs typeface="Courier New" pitchFamily="34" charset="-120"/>
+              </a:rPr>
+              <a:t>.</a:t>
+            </a:r>
+            <a:r>
+              <a:rPr lang="en-US" sz="1050" dirty="0" i="0">
+                <a:solidFill>
+                  <a:srgbClr val="E8E6F0"/>
+                </a:solidFill>
+                <a:latin typeface="Courier New" pitchFamily="34" charset="0"/>
+                <a:ea typeface="Courier New" pitchFamily="34" charset="-122"/>
+                <a:cs typeface="Courier New" pitchFamily="34" charset="-120"/>
+              </a:rPr>
+              <a:t>WithReference</a:t>
+            </a:r>
+            <a:r>
+              <a:rPr lang="en-US" sz="1050" dirty="0" i="0">
+                <a:solidFill>
+                  <a:srgbClr val="E8E6F0"/>
+                </a:solidFill>
+                <a:latin typeface="Courier New" pitchFamily="34" charset="0"/>
+                <a:ea typeface="Courier New" pitchFamily="34" charset="-122"/>
+                <a:cs typeface="Courier New" pitchFamily="34" charset="-120"/>
+              </a:rPr>
+              <a:t>(</a:t>
+            </a:r>
+            <a:r>
+              <a:rPr lang="en-US" sz="1050" dirty="0" i="0">
+                <a:solidFill>
+                  <a:srgbClr val="E8E6F0"/>
+                </a:solidFill>
+                <a:latin typeface="Courier New" pitchFamily="34" charset="0"/>
+                <a:ea typeface="Courier New" pitchFamily="34" charset="-122"/>
+                <a:cs typeface="Courier New" pitchFamily="34" charset="-120"/>
+              </a:rPr>
+              <a:t>admin</a:t>
+            </a:r>
+            <a:r>
+              <a:rPr lang="en-US" sz="1050" dirty="0" i="0">
+                <a:solidFill>
+                  <a:srgbClr val="E8E6F0"/>
+                </a:solidFill>
+                <a:latin typeface="Courier New" pitchFamily="34" charset="0"/>
+                <a:ea typeface="Courier New" pitchFamily="34" charset="-122"/>
+                <a:cs typeface="Courier New" pitchFamily="34" charset="-120"/>
+              </a:rPr>
+              <a:t>)</a:t>
+            </a:r>
+            <a:r>
+              <a:rPr lang="en-US" sz="1050" dirty="0" i="0">
+                <a:solidFill>
+                  <a:srgbClr val="E8E6F0"/>
+                </a:solidFill>
+                <a:latin typeface="Courier New" pitchFamily="34" charset="0"/>
+                <a:ea typeface="Courier New" pitchFamily="34" charset="-122"/>
+                <a:cs typeface="Courier New" pitchFamily="34" charset="-120"/>
+              </a:rPr>
+              <a:t>.</a:t>
+            </a:r>
+            <a:r>
+              <a:rPr lang="en-US" sz="1050" dirty="0" i="0">
+                <a:solidFill>
+                  <a:srgbClr val="E8E6F0"/>
+                </a:solidFill>
+                <a:latin typeface="Courier New" pitchFamily="34" charset="0"/>
+                <a:ea typeface="Courier New" pitchFamily="34" charset="-122"/>
+                <a:cs typeface="Courier New" pitchFamily="34" charset="-120"/>
+              </a:rPr>
+              <a:t>WaitFor</a:t>
+            </a:r>
+            <a:r>
+              <a:rPr lang="en-US" sz="1050" dirty="0" i="0">
+                <a:solidFill>
+                  <a:srgbClr val="E8E6F0"/>
+                </a:solidFill>
+                <a:latin typeface="Courier New" pitchFamily="34" charset="0"/>
+                <a:ea typeface="Courier New" pitchFamily="34" charset="-122"/>
+                <a:cs typeface="Courier New" pitchFamily="34" charset="-120"/>
+              </a:rPr>
+              <a:t>(</a:t>
+            </a:r>
+            <a:r>
+              <a:rPr lang="en-US" sz="1050" dirty="0" i="0">
+                <a:solidFill>
+                  <a:srgbClr val="E8E6F0"/>
+                </a:solidFill>
+                <a:latin typeface="Courier New" pitchFamily="34" charset="0"/>
+                <a:ea typeface="Courier New" pitchFamily="34" charset="-122"/>
+                <a:cs typeface="Courier New" pitchFamily="34" charset="-120"/>
+              </a:rPr>
+              <a:t>admin</a:t>
+            </a:r>
+            <a:r>
+              <a:rPr lang="en-US" sz="1050" dirty="0" i="0">
+                <a:solidFill>
+                  <a:srgbClr val="E8E6F0"/>
+                </a:solidFill>
+                <a:latin typeface="Courier New" pitchFamily="34" charset="0"/>
+                <a:ea typeface="Courier New" pitchFamily="34" charset="-122"/>
+                <a:cs typeface="Courier New" pitchFamily="34" charset="-120"/>
+              </a:rPr>
+              <a:t>)</a:t>
+            </a:r>
+          </a:p>
+          <a:p>
+            <a:pPr indent="0" marL="0">
+              <a:buNone/>
+            </a:pPr>
+            <a:pPr indent="0" marL="0">
+              <a:buNone/>
+            </a:pPr>
+            <a:pPr indent="0" marL="0">
+              <a:buNone/>
+            </a:pPr>
+            <a:pPr indent="0" marL="0">
+              <a:buNone/>
+            </a:pPr>
+            <a:pPr indent="0" marL="0">
+              <a:buNone/>
+            </a:pPr>
+            <a:pPr indent="0" marL="0">
+              <a:buNone/>
+            </a:pPr>
+            <a:pPr indent="0" marL="0">
+              <a:buNone/>
+            </a:pPr>
+            <a:pPr indent="0" marL="0">
+              <a:buNone/>
+            </a:pPr>
+            <a:r>
+              <a:rPr lang="en-US" sz="1050" dirty="0" i="0">
+                <a:solidFill>
+                  <a:srgbClr val="E8E6F0"/>
+                </a:solidFill>
+                <a:latin typeface="Courier New" pitchFamily="34" charset="0"/>
+                <a:ea typeface="Courier New" pitchFamily="34" charset="-122"/>
+                <a:cs typeface="Courier New" pitchFamily="34" charset="-120"/>
+              </a:rPr>
+              <a:t>    </a:t>
+            </a:r>
+            <a:r>
+              <a:rPr lang="en-US" sz="1050" dirty="0" i="0">
+                <a:solidFill>
+                  <a:srgbClr val="E8E6F0"/>
+                </a:solidFill>
+                <a:latin typeface="Courier New" pitchFamily="34" charset="0"/>
+                <a:ea typeface="Courier New" pitchFamily="34" charset="-122"/>
+                <a:cs typeface="Courier New" pitchFamily="34" charset="-120"/>
+              </a:rPr>
+              <a:t>.</a:t>
+            </a:r>
+            <a:r>
+              <a:rPr lang="en-US" sz="1050" dirty="0" i="0">
+                <a:solidFill>
+                  <a:srgbClr val="E8E6F0"/>
+                </a:solidFill>
+                <a:latin typeface="Courier New" pitchFamily="34" charset="0"/>
+                <a:ea typeface="Courier New" pitchFamily="34" charset="-122"/>
+                <a:cs typeface="Courier New" pitchFamily="34" charset="-120"/>
+              </a:rPr>
+              <a:t>WithTerminal</a:t>
+            </a:r>
+            <a:r>
+              <a:rPr lang="en-US" sz="1050" dirty="0" i="0">
+                <a:solidFill>
+                  <a:srgbClr val="E8E6F0"/>
+                </a:solidFill>
+                <a:latin typeface="Courier New" pitchFamily="34" charset="0"/>
+                <a:ea typeface="Courier New" pitchFamily="34" charset="-122"/>
+                <a:cs typeface="Courier New" pitchFamily="34" charset="-120"/>
+              </a:rPr>
+              <a:t>(</a:t>
+            </a:r>
+            <a:r>
+              <a:rPr lang="en-US" sz="1050" dirty="0" i="0">
+                <a:solidFill>
+                  <a:srgbClr val="E8E6F0"/>
+                </a:solidFill>
+                <a:latin typeface="Courier New" pitchFamily="34" charset="0"/>
+                <a:ea typeface="Courier New" pitchFamily="34" charset="-122"/>
+                <a:cs typeface="Courier New" pitchFamily="34" charset="-120"/>
+              </a:rPr>
+              <a:t>)</a:t>
+            </a:r>
+            <a:r>
+              <a:rPr lang="en-US" sz="1050" dirty="0" i="0">
+                <a:solidFill>
+                  <a:srgbClr val="E8E6F0"/>
+                </a:solidFill>
+                <a:latin typeface="Courier New" pitchFamily="34" charset="0"/>
+                <a:ea typeface="Courier New" pitchFamily="34" charset="-122"/>
+                <a:cs typeface="Courier New" pitchFamily="34" charset="-120"/>
+              </a:rPr>
+              <a:t>;</a:t>
+            </a:r>
+          </a:p>
+        </p:txBody>
+      </p:sp>
+      <p:sp>
+        <p:nvSpPr>
+          <p:cNvPr id="6" name="Terminal CLI panel"/>
+          <p:cNvSpPr/>
+          <p:nvPr/>
+        </p:nvSpPr>
+        <p:spPr>
+          <a:xfrm>
+            <a:off x="548640" y="3017520"/>
+            <a:ext cx="6949440" cy="3017520"/>
+          </a:xfrm>
+          <a:prstGeom prst="roundRect">
+            <a:avLst>
+              <a:gd name="adj" fmla="val 5714"/>
+            </a:avLst>
+          </a:prstGeom>
+          <a:solidFill>
+            <a:srgbClr val="1C1830"/>
+          </a:solidFill>
+          <a:ln w="12700">
+            <a:solidFill>
+              <a:srgbClr val="1C1830"/>
+            </a:solidFill>
+            <a:prstDash val="solid"/>
+          </a:ln>
+        </p:spPr>
+        <p:txBody>
+          <a:bodyPr/>
+          <a:p/>
+        </p:txBody>
+      </p:sp>
+      <p:sp>
+        <p:nvSpPr>
+          <p:cNvPr id="7" name="Terminal CLI label"/>
+          <p:cNvSpPr txBox="1"/>
+          <p:nvPr/>
+        </p:nvSpPr>
+        <p:spPr>
+          <a:xfrm>
+            <a:off x="777240" y="3108960"/>
+            <a:ext cx="6492240" cy="274320"/>
+          </a:xfrm>
+          <a:prstGeom prst="rect">
+            <a:avLst/>
+          </a:prstGeom>
+          <a:noFill/>
+          <a:ln/>
+        </p:spPr>
+        <p:txBody>
+          <a:bodyPr wrap="square" lIns="0" tIns="0" rIns="0" bIns="0" rtlCol="0" anchor="ctr"/>
+          <a:lstStyle/>
+          <a:p>
+            <a:pPr indent="0" marL="0">
+              <a:buNone/>
+            </a:pPr>
+            <a:r>
+              <a:rPr lang="en-US" sz="1000" b="1" spc="100" kern="0" dirty="0">
+                <a:solidFill>
+                  <a:srgbClr val="8B87A3"/>
+                </a:solidFill>
+                <a:latin typeface="Calibri" pitchFamily="34" charset="0"/>
+                <a:ea typeface="Calibri" pitchFamily="34" charset="-122"/>
+                <a:cs typeface="Calibri" pitchFamily="34" charset="-120"/>
+              </a:rPr>
+              <a:t>C#  ·  producerconsole.cs  (trimmed)</a:t>
+            </a:r>
+            <a:endParaRPr lang="en-US" sz="1000" dirty="0"/>
+          </a:p>
+        </p:txBody>
+      </p:sp>
+      <p:sp>
+        <p:nvSpPr>
+          <p:cNvPr id="8" name="Terminal CLI text"/>
+          <p:cNvSpPr txBox="1"/>
+          <p:nvPr/>
+        </p:nvSpPr>
+        <p:spPr>
+          <a:xfrm>
+            <a:off x="777240" y="3429000"/>
+            <a:ext cx="6492240" cy="2514600"/>
+          </a:xfrm>
+          <a:prstGeom prst="rect">
+            <a:avLst/>
+          </a:prstGeom>
+          <a:noFill/>
+          <a:ln/>
+        </p:spPr>
+        <p:txBody>
+          <a:bodyPr wrap="square" lIns="0" tIns="0" rIns="0" bIns="0" rtlCol="0" anchor="t"/>
+          <a:lstStyle/>
+          <a:p>
+            <a:pPr indent="0" marL="0">
+              <a:buNone/>
+            </a:pPr>
+            <a:r>
+              <a:rPr lang="en-US" sz="1000" i="1" dirty="0">
+                <a:solidFill>
+                  <a:srgbClr val="8B87A3"/>
+                </a:solidFill>
+                <a:latin typeface="Courier New" pitchFamily="34" charset="0"/>
+                <a:ea typeface="Courier New" pitchFamily="34" charset="-122"/>
+                <a:cs typeface="Courier New" pitchFamily="34" charset="-120"/>
+              </a:rPr>
+              <a:t>// Address injected by WithReference(admin)</a:t>
+            </a:r>
+          </a:p>
+          <a:p>
+            <a:pPr indent="0" marL="0">
+              <a:buNone/>
+            </a:pPr>
+            <a:r>
+              <a:rPr lang="en-US" sz="1000" i="0" dirty="0">
+                <a:solidFill>
+                  <a:srgbClr val="C4A7FF"/>
+                </a:solidFill>
+                <a:latin typeface="Courier New" pitchFamily="34" charset="0"/>
+                <a:ea typeface="Courier New" pitchFamily="34" charset="-122"/>
+                <a:cs typeface="Courier New" pitchFamily="34" charset="-120"/>
+              </a:rPr>
+              <a:t>var</a:t>
+            </a:r>
+            <a:r>
+              <a:rPr lang="en-US" sz="1000" i="0" dirty="0">
+                <a:solidFill>
+                  <a:srgbClr val="E8E6F0"/>
+                </a:solidFill>
+                <a:latin typeface="Courier New" pitchFamily="34" charset="0"/>
+                <a:ea typeface="Courier New" pitchFamily="34" charset="-122"/>
+                <a:cs typeface="Courier New" pitchFamily="34" charset="-120"/>
+              </a:rPr>
+              <a:t> </a:t>
+            </a:r>
+            <a:r>
+              <a:rPr lang="en-US" sz="1000" i="0" dirty="0">
+                <a:solidFill>
+                  <a:srgbClr val="E8E6F0"/>
+                </a:solidFill>
+                <a:latin typeface="Courier New" pitchFamily="34" charset="0"/>
+                <a:ea typeface="Courier New" pitchFamily="34" charset="-122"/>
+                <a:cs typeface="Courier New" pitchFamily="34" charset="-120"/>
+              </a:rPr>
+              <a:t>adminUrl</a:t>
+            </a:r>
+            <a:r>
+              <a:rPr lang="en-US" sz="1000" i="0" dirty="0">
+                <a:solidFill>
+                  <a:srgbClr val="E8E6F0"/>
+                </a:solidFill>
+                <a:latin typeface="Courier New" pitchFamily="34" charset="0"/>
+                <a:ea typeface="Courier New" pitchFamily="34" charset="-122"/>
+                <a:cs typeface="Courier New" pitchFamily="34" charset="-120"/>
+              </a:rPr>
+              <a:t> </a:t>
+            </a:r>
+            <a:r>
+              <a:rPr lang="en-US" sz="1000" i="0" dirty="0">
+                <a:solidFill>
+                  <a:srgbClr val="E8E6F0"/>
+                </a:solidFill>
+                <a:latin typeface="Courier New" pitchFamily="34" charset="0"/>
+                <a:ea typeface="Courier New" pitchFamily="34" charset="-122"/>
+                <a:cs typeface="Courier New" pitchFamily="34" charset="-120"/>
+              </a:rPr>
+              <a:t>=</a:t>
+            </a:r>
+          </a:p>
+          <a:p>
+            <a:pPr indent="0" marL="0">
+              <a:buNone/>
+            </a:pPr>
+            <a:r>
+              <a:rPr lang="en-US" sz="1000" i="0" dirty="0">
+                <a:solidFill>
+                  <a:srgbClr val="E8E6F0"/>
+                </a:solidFill>
+                <a:latin typeface="Courier New" pitchFamily="34" charset="0"/>
+                <a:ea typeface="Courier New" pitchFamily="34" charset="-122"/>
+                <a:cs typeface="Courier New" pitchFamily="34" charset="-120"/>
+              </a:rPr>
+              <a:t>    </a:t>
+            </a:r>
+            <a:r>
+              <a:rPr lang="en-US" sz="1000" i="0" dirty="0">
+                <a:solidFill>
+                  <a:srgbClr val="7CC7FF"/>
+                </a:solidFill>
+                <a:latin typeface="Courier New" pitchFamily="34" charset="0"/>
+                <a:ea typeface="Courier New" pitchFamily="34" charset="-122"/>
+                <a:cs typeface="Courier New" pitchFamily="34" charset="-120"/>
+              </a:rPr>
+              <a:t>Environment</a:t>
+            </a:r>
+            <a:r>
+              <a:rPr lang="en-US" sz="1000" i="0" dirty="0">
+                <a:solidFill>
+                  <a:srgbClr val="E8E6F0"/>
+                </a:solidFill>
+                <a:latin typeface="Courier New" pitchFamily="34" charset="0"/>
+                <a:ea typeface="Courier New" pitchFamily="34" charset="-122"/>
+                <a:cs typeface="Courier New" pitchFamily="34" charset="-120"/>
+              </a:rPr>
+              <a:t>.</a:t>
+            </a:r>
+            <a:r>
+              <a:rPr lang="en-US" sz="1000" i="0" dirty="0">
+                <a:solidFill>
+                  <a:srgbClr val="E8E6F0"/>
+                </a:solidFill>
+                <a:latin typeface="Courier New" pitchFamily="34" charset="0"/>
+                <a:ea typeface="Courier New" pitchFamily="34" charset="-122"/>
+                <a:cs typeface="Courier New" pitchFamily="34" charset="-120"/>
+              </a:rPr>
+              <a:t>GetEnvironmentVariable</a:t>
+            </a:r>
+            <a:r>
+              <a:rPr lang="en-US" sz="1000" i="0" dirty="0">
+                <a:solidFill>
+                  <a:srgbClr val="E8E6F0"/>
+                </a:solidFill>
+                <a:latin typeface="Courier New" pitchFamily="34" charset="0"/>
+                <a:ea typeface="Courier New" pitchFamily="34" charset="-122"/>
+                <a:cs typeface="Courier New" pitchFamily="34" charset="-120"/>
+              </a:rPr>
+              <a:t>(</a:t>
+            </a:r>
+            <a:r>
+              <a:rPr lang="en-US" sz="1000" i="0" dirty="0">
+                <a:solidFill>
+                  <a:srgbClr val="8FE3B0"/>
+                </a:solidFill>
+                <a:latin typeface="Courier New" pitchFamily="34" charset="0"/>
+                <a:ea typeface="Courier New" pitchFamily="34" charset="-122"/>
+                <a:cs typeface="Courier New" pitchFamily="34" charset="-120"/>
+              </a:rPr>
+              <a:t>"services__boardadmin__https__0"</a:t>
+            </a:r>
+            <a:r>
+              <a:rPr lang="en-US" sz="1000" i="0" dirty="0">
+                <a:solidFill>
+                  <a:srgbClr val="E8E6F0"/>
+                </a:solidFill>
+                <a:latin typeface="Courier New" pitchFamily="34" charset="0"/>
+                <a:ea typeface="Courier New" pitchFamily="34" charset="-122"/>
+                <a:cs typeface="Courier New" pitchFamily="34" charset="-120"/>
+              </a:rPr>
+              <a:t>)</a:t>
+            </a:r>
+            <a:r>
+              <a:rPr lang="en-US" sz="1000" i="0" dirty="0">
+                <a:solidFill>
+                  <a:srgbClr val="E8E6F0"/>
+                </a:solidFill>
+                <a:latin typeface="Courier New" pitchFamily="34" charset="0"/>
+                <a:ea typeface="Courier New" pitchFamily="34" charset="-122"/>
+                <a:cs typeface="Courier New" pitchFamily="34" charset="-120"/>
+              </a:rPr>
+              <a:t> </a:t>
+            </a:r>
+            <a:r>
+              <a:rPr lang="en-US" sz="1000" i="0" dirty="0">
+                <a:solidFill>
+                  <a:srgbClr val="E8E6F0"/>
+                </a:solidFill>
+                <a:latin typeface="Courier New" pitchFamily="34" charset="0"/>
+                <a:ea typeface="Courier New" pitchFamily="34" charset="-122"/>
+                <a:cs typeface="Courier New" pitchFamily="34" charset="-120"/>
+              </a:rPr>
+              <a:t>?</a:t>
+            </a:r>
+            <a:r>
+              <a:rPr lang="en-US" sz="1000" i="0" dirty="0">
+                <a:solidFill>
+                  <a:srgbClr val="E8E6F0"/>
+                </a:solidFill>
+                <a:latin typeface="Courier New" pitchFamily="34" charset="0"/>
+                <a:ea typeface="Courier New" pitchFamily="34" charset="-122"/>
+                <a:cs typeface="Courier New" pitchFamily="34" charset="-120"/>
+              </a:rPr>
+              <a:t>?</a:t>
+            </a:r>
+          </a:p>
+          <a:p>
+            <a:pPr indent="0" marL="0">
+              <a:buNone/>
+            </a:pPr>
+            <a:r>
+              <a:rPr lang="en-US" sz="1000" i="0" dirty="0">
+                <a:solidFill>
+                  <a:srgbClr val="E8E6F0"/>
+                </a:solidFill>
+                <a:latin typeface="Courier New" pitchFamily="34" charset="0"/>
+                <a:ea typeface="Courier New" pitchFamily="34" charset="-122"/>
+                <a:cs typeface="Courier New" pitchFamily="34" charset="-120"/>
+              </a:rPr>
+              <a:t>    </a:t>
+            </a:r>
+            <a:r>
+              <a:rPr lang="en-US" sz="1000" i="0" dirty="0">
+                <a:solidFill>
+                  <a:srgbClr val="7CC7FF"/>
+                </a:solidFill>
+                <a:latin typeface="Courier New" pitchFamily="34" charset="0"/>
+                <a:ea typeface="Courier New" pitchFamily="34" charset="-122"/>
+                <a:cs typeface="Courier New" pitchFamily="34" charset="-120"/>
+              </a:rPr>
+              <a:t>Environment</a:t>
+            </a:r>
+            <a:r>
+              <a:rPr lang="en-US" sz="1000" i="0" dirty="0">
+                <a:solidFill>
+                  <a:srgbClr val="E8E6F0"/>
+                </a:solidFill>
+                <a:latin typeface="Courier New" pitchFamily="34" charset="0"/>
+                <a:ea typeface="Courier New" pitchFamily="34" charset="-122"/>
+                <a:cs typeface="Courier New" pitchFamily="34" charset="-120"/>
+              </a:rPr>
+              <a:t>.</a:t>
+            </a:r>
+            <a:r>
+              <a:rPr lang="en-US" sz="1000" i="0" dirty="0">
+                <a:solidFill>
+                  <a:srgbClr val="E8E6F0"/>
+                </a:solidFill>
+                <a:latin typeface="Courier New" pitchFamily="34" charset="0"/>
+                <a:ea typeface="Courier New" pitchFamily="34" charset="-122"/>
+                <a:cs typeface="Courier New" pitchFamily="34" charset="-120"/>
+              </a:rPr>
+              <a:t>GetEnvironmentVariable</a:t>
+            </a:r>
+            <a:r>
+              <a:rPr lang="en-US" sz="1000" i="0" dirty="0">
+                <a:solidFill>
+                  <a:srgbClr val="E8E6F0"/>
+                </a:solidFill>
+                <a:latin typeface="Courier New" pitchFamily="34" charset="0"/>
+                <a:ea typeface="Courier New" pitchFamily="34" charset="-122"/>
+                <a:cs typeface="Courier New" pitchFamily="34" charset="-120"/>
+              </a:rPr>
+              <a:t>(</a:t>
+            </a:r>
+            <a:r>
+              <a:rPr lang="en-US" sz="1000" i="0" dirty="0">
+                <a:solidFill>
+                  <a:srgbClr val="8FE3B0"/>
+                </a:solidFill>
+                <a:latin typeface="Courier New" pitchFamily="34" charset="0"/>
+                <a:ea typeface="Courier New" pitchFamily="34" charset="-122"/>
+                <a:cs typeface="Courier New" pitchFamily="34" charset="-120"/>
+              </a:rPr>
+              <a:t>"services__boardadmin__http__0"</a:t>
+            </a:r>
+            <a:r>
+              <a:rPr lang="en-US" sz="1000" i="0" dirty="0">
+                <a:solidFill>
+                  <a:srgbClr val="E8E6F0"/>
+                </a:solidFill>
+                <a:latin typeface="Courier New" pitchFamily="34" charset="0"/>
+                <a:ea typeface="Courier New" pitchFamily="34" charset="-122"/>
+                <a:cs typeface="Courier New" pitchFamily="34" charset="-120"/>
+              </a:rPr>
+              <a:t>)</a:t>
+            </a:r>
+            <a:r>
+              <a:rPr lang="en-US" sz="1000" i="0" dirty="0">
+                <a:solidFill>
+                  <a:srgbClr val="E8E6F0"/>
+                </a:solidFill>
+                <a:latin typeface="Courier New" pitchFamily="34" charset="0"/>
+                <a:ea typeface="Courier New" pitchFamily="34" charset="-122"/>
+                <a:cs typeface="Courier New" pitchFamily="34" charset="-120"/>
+              </a:rPr>
+              <a:t> </a:t>
+            </a:r>
+            <a:r>
+              <a:rPr lang="en-US" sz="1000" i="0" dirty="0">
+                <a:solidFill>
+                  <a:srgbClr val="E8E6F0"/>
+                </a:solidFill>
+                <a:latin typeface="Courier New" pitchFamily="34" charset="0"/>
+                <a:ea typeface="Courier New" pitchFamily="34" charset="-122"/>
+                <a:cs typeface="Courier New" pitchFamily="34" charset="-120"/>
+              </a:rPr>
+              <a:t>?</a:t>
+            </a:r>
+            <a:r>
+              <a:rPr lang="en-US" sz="1000" i="0" dirty="0">
+                <a:solidFill>
+                  <a:srgbClr val="E8E6F0"/>
+                </a:solidFill>
+                <a:latin typeface="Courier New" pitchFamily="34" charset="0"/>
+                <a:ea typeface="Courier New" pitchFamily="34" charset="-122"/>
+                <a:cs typeface="Courier New" pitchFamily="34" charset="-120"/>
+              </a:rPr>
+              <a:t>?</a:t>
+            </a:r>
+          </a:p>
+          <a:p>
+            <a:pPr indent="0" marL="0">
+              <a:buNone/>
+            </a:pPr>
+            <a:r>
+              <a:rPr lang="en-US" sz="1000" i="0" dirty="0">
+                <a:solidFill>
+                  <a:srgbClr val="E8E6F0"/>
+                </a:solidFill>
+                <a:latin typeface="Courier New" pitchFamily="34" charset="0"/>
+                <a:ea typeface="Courier New" pitchFamily="34" charset="-122"/>
+                <a:cs typeface="Courier New" pitchFamily="34" charset="-120"/>
+              </a:rPr>
+              <a:t>    </a:t>
+            </a:r>
+            <a:r>
+              <a:rPr lang="en-US" sz="1000" i="0" dirty="0">
+                <a:solidFill>
+                  <a:srgbClr val="C4A7FF"/>
+                </a:solidFill>
+                <a:latin typeface="Courier New" pitchFamily="34" charset="0"/>
+                <a:ea typeface="Courier New" pitchFamily="34" charset="-122"/>
+                <a:cs typeface="Courier New" pitchFamily="34" charset="-120"/>
+              </a:rPr>
+              <a:t>throw</a:t>
+            </a:r>
+            <a:r>
+              <a:rPr lang="en-US" sz="1000" i="0" dirty="0">
+                <a:solidFill>
+                  <a:srgbClr val="E8E6F0"/>
+                </a:solidFill>
+                <a:latin typeface="Courier New" pitchFamily="34" charset="0"/>
+                <a:ea typeface="Courier New" pitchFamily="34" charset="-122"/>
+                <a:cs typeface="Courier New" pitchFamily="34" charset="-120"/>
+              </a:rPr>
+              <a:t> </a:t>
+            </a:r>
+            <a:r>
+              <a:rPr lang="en-US" sz="1000" i="0" dirty="0">
+                <a:solidFill>
+                  <a:srgbClr val="C4A7FF"/>
+                </a:solidFill>
+                <a:latin typeface="Courier New" pitchFamily="34" charset="0"/>
+                <a:ea typeface="Courier New" pitchFamily="34" charset="-122"/>
+                <a:cs typeface="Courier New" pitchFamily="34" charset="-120"/>
+              </a:rPr>
+              <a:t>new</a:t>
+            </a:r>
+            <a:r>
+              <a:rPr lang="en-US" sz="1000" i="0" dirty="0">
+                <a:solidFill>
+                  <a:srgbClr val="E8E6F0"/>
+                </a:solidFill>
+                <a:latin typeface="Courier New" pitchFamily="34" charset="0"/>
+                <a:ea typeface="Courier New" pitchFamily="34" charset="-122"/>
+                <a:cs typeface="Courier New" pitchFamily="34" charset="-120"/>
+              </a:rPr>
+              <a:t> </a:t>
+            </a:r>
+            <a:r>
+              <a:rPr lang="en-US" sz="1000" i="0" dirty="0">
+                <a:solidFill>
+                  <a:srgbClr val="7CC7FF"/>
+                </a:solidFill>
+                <a:latin typeface="Courier New" pitchFamily="34" charset="0"/>
+                <a:ea typeface="Courier New" pitchFamily="34" charset="-122"/>
+                <a:cs typeface="Courier New" pitchFamily="34" charset="-120"/>
+              </a:rPr>
+              <a:t>InvalidOperationException</a:t>
+            </a:r>
+            <a:r>
+              <a:rPr lang="en-US" sz="1000" i="0" dirty="0">
+                <a:solidFill>
+                  <a:srgbClr val="E8E6F0"/>
+                </a:solidFill>
+                <a:latin typeface="Courier New" pitchFamily="34" charset="0"/>
+                <a:ea typeface="Courier New" pitchFamily="34" charset="-122"/>
+                <a:cs typeface="Courier New" pitchFamily="34" charset="-120"/>
+              </a:rPr>
+              <a:t>(</a:t>
+            </a:r>
+            <a:r>
+              <a:rPr lang="en-US" sz="1000" i="0" dirty="0">
+                <a:solidFill>
+                  <a:srgbClr val="8FE3B0"/>
+                </a:solidFill>
+                <a:latin typeface="Courier New" pitchFamily="34" charset="0"/>
+                <a:ea typeface="Courier New" pitchFamily="34" charset="-122"/>
+                <a:cs typeface="Courier New" pitchFamily="34" charset="-120"/>
+              </a:rPr>
+              <a:t>"The boardadmin endpoint ..."</a:t>
+            </a:r>
+            <a:r>
+              <a:rPr lang="en-US" sz="1000" i="0" dirty="0">
+                <a:solidFill>
+                  <a:srgbClr val="E8E6F0"/>
+                </a:solidFill>
+                <a:latin typeface="Courier New" pitchFamily="34" charset="0"/>
+                <a:ea typeface="Courier New" pitchFamily="34" charset="-122"/>
+                <a:cs typeface="Courier New" pitchFamily="34" charset="-120"/>
+              </a:rPr>
+              <a:t>)</a:t>
+            </a:r>
+            <a:r>
+              <a:rPr lang="en-US" sz="1000" i="0" dirty="0">
+                <a:solidFill>
+                  <a:srgbClr val="E8E6F0"/>
+                </a:solidFill>
+                <a:latin typeface="Courier New" pitchFamily="34" charset="0"/>
+                <a:ea typeface="Courier New" pitchFamily="34" charset="-122"/>
+                <a:cs typeface="Courier New" pitchFamily="34" charset="-120"/>
+              </a:rPr>
+              <a:t>;</a:t>
+            </a:r>
+          </a:p>
+          <a:p>
+            <a:pPr indent="0" marL="0">
+              <a:buNone/>
+            </a:pPr>
+            <a:r>
+              <a:rPr lang="en-US" sz="1000" i="0" dirty="0">
+                <a:solidFill>
+                  <a:srgbClr val="E8E6F0"/>
+                </a:solidFill>
+                <a:latin typeface="Courier New" pitchFamily="34" charset="0"/>
+                <a:ea typeface="Courier New" pitchFamily="34" charset="-122"/>
+                <a:cs typeface="Courier New" pitchFamily="34" charset="-120"/>
+              </a:rPr>
+              <a:t> </a:t>
+            </a:r>
+          </a:p>
+          <a:p>
+            <a:pPr indent="0" marL="0">
+              <a:buNone/>
+            </a:pPr>
+            <a:r>
+              <a:rPr lang="en-US" sz="1000" i="0" dirty="0">
+                <a:solidFill>
+                  <a:srgbClr val="C4A7FF"/>
+                </a:solidFill>
+                <a:latin typeface="Courier New" pitchFamily="34" charset="0"/>
+                <a:ea typeface="Courier New" pitchFamily="34" charset="-122"/>
+                <a:cs typeface="Courier New" pitchFamily="34" charset="-120"/>
+              </a:rPr>
+              <a:t>using</a:t>
+            </a:r>
+            <a:r>
+              <a:rPr lang="en-US" sz="1000" i="0" dirty="0">
+                <a:solidFill>
+                  <a:srgbClr val="E8E6F0"/>
+                </a:solidFill>
+                <a:latin typeface="Courier New" pitchFamily="34" charset="0"/>
+                <a:ea typeface="Courier New" pitchFamily="34" charset="-122"/>
+                <a:cs typeface="Courier New" pitchFamily="34" charset="-120"/>
+              </a:rPr>
+              <a:t> </a:t>
+            </a:r>
+            <a:r>
+              <a:rPr lang="en-US" sz="1000" i="0" dirty="0">
+                <a:solidFill>
+                  <a:srgbClr val="C4A7FF"/>
+                </a:solidFill>
+                <a:latin typeface="Courier New" pitchFamily="34" charset="0"/>
+                <a:ea typeface="Courier New" pitchFamily="34" charset="-122"/>
+                <a:cs typeface="Courier New" pitchFamily="34" charset="-120"/>
+              </a:rPr>
+              <a:t>var</a:t>
+            </a:r>
+            <a:r>
+              <a:rPr lang="en-US" sz="1000" i="0" dirty="0">
+                <a:solidFill>
+                  <a:srgbClr val="E8E6F0"/>
+                </a:solidFill>
+                <a:latin typeface="Courier New" pitchFamily="34" charset="0"/>
+                <a:ea typeface="Courier New" pitchFamily="34" charset="-122"/>
+                <a:cs typeface="Courier New" pitchFamily="34" charset="-120"/>
+              </a:rPr>
+              <a:t> </a:t>
+            </a:r>
+            <a:r>
+              <a:rPr lang="en-US" sz="1000" i="0" dirty="0">
+                <a:solidFill>
+                  <a:srgbClr val="E8E6F0"/>
+                </a:solidFill>
+                <a:latin typeface="Courier New" pitchFamily="34" charset="0"/>
+                <a:ea typeface="Courier New" pitchFamily="34" charset="-122"/>
+                <a:cs typeface="Courier New" pitchFamily="34" charset="-120"/>
+              </a:rPr>
+              <a:t>client</a:t>
+            </a:r>
+            <a:r>
+              <a:rPr lang="en-US" sz="1000" i="0" dirty="0">
+                <a:solidFill>
+                  <a:srgbClr val="E8E6F0"/>
+                </a:solidFill>
+                <a:latin typeface="Courier New" pitchFamily="34" charset="0"/>
+                <a:ea typeface="Courier New" pitchFamily="34" charset="-122"/>
+                <a:cs typeface="Courier New" pitchFamily="34" charset="-120"/>
+              </a:rPr>
+              <a:t> </a:t>
+            </a:r>
+            <a:r>
+              <a:rPr lang="en-US" sz="1000" i="0" dirty="0">
+                <a:solidFill>
+                  <a:srgbClr val="E8E6F0"/>
+                </a:solidFill>
+                <a:latin typeface="Courier New" pitchFamily="34" charset="0"/>
+                <a:ea typeface="Courier New" pitchFamily="34" charset="-122"/>
+                <a:cs typeface="Courier New" pitchFamily="34" charset="-120"/>
+              </a:rPr>
+              <a:t>=</a:t>
+            </a:r>
+            <a:r>
+              <a:rPr lang="en-US" sz="1000" i="0" dirty="0">
+                <a:solidFill>
+                  <a:srgbClr val="E8E6F0"/>
+                </a:solidFill>
+                <a:latin typeface="Courier New" pitchFamily="34" charset="0"/>
+                <a:ea typeface="Courier New" pitchFamily="34" charset="-122"/>
+                <a:cs typeface="Courier New" pitchFamily="34" charset="-120"/>
+              </a:rPr>
+              <a:t> </a:t>
+            </a:r>
+            <a:r>
+              <a:rPr lang="en-US" sz="1000" i="0" dirty="0">
+                <a:solidFill>
+                  <a:srgbClr val="C4A7FF"/>
+                </a:solidFill>
+                <a:latin typeface="Courier New" pitchFamily="34" charset="0"/>
+                <a:ea typeface="Courier New" pitchFamily="34" charset="-122"/>
+                <a:cs typeface="Courier New" pitchFamily="34" charset="-120"/>
+              </a:rPr>
+              <a:t>new</a:t>
+            </a:r>
+            <a:r>
+              <a:rPr lang="en-US" sz="1000" i="0" dirty="0">
+                <a:solidFill>
+                  <a:srgbClr val="E8E6F0"/>
+                </a:solidFill>
+                <a:latin typeface="Courier New" pitchFamily="34" charset="0"/>
+                <a:ea typeface="Courier New" pitchFamily="34" charset="-122"/>
+                <a:cs typeface="Courier New" pitchFamily="34" charset="-120"/>
+              </a:rPr>
+              <a:t> </a:t>
+            </a:r>
+            <a:r>
+              <a:rPr lang="en-US" sz="1000" i="0" dirty="0">
+                <a:solidFill>
+                  <a:srgbClr val="7CC7FF"/>
+                </a:solidFill>
+                <a:latin typeface="Courier New" pitchFamily="34" charset="0"/>
+                <a:ea typeface="Courier New" pitchFamily="34" charset="-122"/>
+                <a:cs typeface="Courier New" pitchFamily="34" charset="-120"/>
+              </a:rPr>
+              <a:t>HttpClient</a:t>
+            </a:r>
+            <a:r>
+              <a:rPr lang="en-US" sz="1000" i="0" dirty="0">
+                <a:solidFill>
+                  <a:srgbClr val="E8E6F0"/>
+                </a:solidFill>
+                <a:latin typeface="Courier New" pitchFamily="34" charset="0"/>
+                <a:ea typeface="Courier New" pitchFamily="34" charset="-122"/>
+                <a:cs typeface="Courier New" pitchFamily="34" charset="-120"/>
+              </a:rPr>
+              <a:t> </a:t>
+            </a:r>
+            <a:r>
+              <a:rPr lang="en-US" sz="1000" i="0" dirty="0">
+                <a:solidFill>
+                  <a:srgbClr val="E8E6F0"/>
+                </a:solidFill>
+                <a:latin typeface="Courier New" pitchFamily="34" charset="0"/>
+                <a:ea typeface="Courier New" pitchFamily="34" charset="-122"/>
+                <a:cs typeface="Courier New" pitchFamily="34" charset="-120"/>
+              </a:rPr>
+              <a:t>{</a:t>
+            </a:r>
+            <a:r>
+              <a:rPr lang="en-US" sz="1000" i="0" dirty="0">
+                <a:solidFill>
+                  <a:srgbClr val="E8E6F0"/>
+                </a:solidFill>
+                <a:latin typeface="Courier New" pitchFamily="34" charset="0"/>
+                <a:ea typeface="Courier New" pitchFamily="34" charset="-122"/>
+                <a:cs typeface="Courier New" pitchFamily="34" charset="-120"/>
+              </a:rPr>
+              <a:t> </a:t>
+            </a:r>
+            <a:r>
+              <a:rPr lang="en-US" sz="1000" i="0" dirty="0">
+                <a:solidFill>
+                  <a:srgbClr val="E8E6F0"/>
+                </a:solidFill>
+                <a:latin typeface="Courier New" pitchFamily="34" charset="0"/>
+                <a:ea typeface="Courier New" pitchFamily="34" charset="-122"/>
+                <a:cs typeface="Courier New" pitchFamily="34" charset="-120"/>
+              </a:rPr>
+              <a:t>BaseAddress</a:t>
+            </a:r>
+            <a:r>
+              <a:rPr lang="en-US" sz="1000" i="0" dirty="0">
+                <a:solidFill>
+                  <a:srgbClr val="E8E6F0"/>
+                </a:solidFill>
+                <a:latin typeface="Courier New" pitchFamily="34" charset="0"/>
+                <a:ea typeface="Courier New" pitchFamily="34" charset="-122"/>
+                <a:cs typeface="Courier New" pitchFamily="34" charset="-120"/>
+              </a:rPr>
+              <a:t> </a:t>
+            </a:r>
+            <a:r>
+              <a:rPr lang="en-US" sz="1000" i="0" dirty="0">
+                <a:solidFill>
+                  <a:srgbClr val="E8E6F0"/>
+                </a:solidFill>
+                <a:latin typeface="Courier New" pitchFamily="34" charset="0"/>
+                <a:ea typeface="Courier New" pitchFamily="34" charset="-122"/>
+                <a:cs typeface="Courier New" pitchFamily="34" charset="-120"/>
+              </a:rPr>
+              <a:t>=</a:t>
+            </a:r>
+            <a:r>
+              <a:rPr lang="en-US" sz="1000" i="0" dirty="0">
+                <a:solidFill>
+                  <a:srgbClr val="E8E6F0"/>
+                </a:solidFill>
+                <a:latin typeface="Courier New" pitchFamily="34" charset="0"/>
+                <a:ea typeface="Courier New" pitchFamily="34" charset="-122"/>
+                <a:cs typeface="Courier New" pitchFamily="34" charset="-120"/>
+              </a:rPr>
+              <a:t> </a:t>
+            </a:r>
+            <a:r>
+              <a:rPr lang="en-US" sz="1000" i="0" dirty="0">
+                <a:solidFill>
+                  <a:srgbClr val="C4A7FF"/>
+                </a:solidFill>
+                <a:latin typeface="Courier New" pitchFamily="34" charset="0"/>
+                <a:ea typeface="Courier New" pitchFamily="34" charset="-122"/>
+                <a:cs typeface="Courier New" pitchFamily="34" charset="-120"/>
+              </a:rPr>
+              <a:t>new</a:t>
+            </a:r>
+            <a:r>
+              <a:rPr lang="en-US" sz="1000" i="0" dirty="0">
+                <a:solidFill>
+                  <a:srgbClr val="E8E6F0"/>
+                </a:solidFill>
+                <a:latin typeface="Courier New" pitchFamily="34" charset="0"/>
+                <a:ea typeface="Courier New" pitchFamily="34" charset="-122"/>
+                <a:cs typeface="Courier New" pitchFamily="34" charset="-120"/>
+              </a:rPr>
+              <a:t> </a:t>
+            </a:r>
+            <a:r>
+              <a:rPr lang="en-US" sz="1000" i="0" dirty="0">
+                <a:solidFill>
+                  <a:srgbClr val="7CC7FF"/>
+                </a:solidFill>
+                <a:latin typeface="Courier New" pitchFamily="34" charset="0"/>
+                <a:ea typeface="Courier New" pitchFamily="34" charset="-122"/>
+                <a:cs typeface="Courier New" pitchFamily="34" charset="-120"/>
+              </a:rPr>
+              <a:t>Uri</a:t>
+            </a:r>
+            <a:r>
+              <a:rPr lang="en-US" sz="1000" i="0" dirty="0">
+                <a:solidFill>
+                  <a:srgbClr val="E8E6F0"/>
+                </a:solidFill>
+                <a:latin typeface="Courier New" pitchFamily="34" charset="0"/>
+                <a:ea typeface="Courier New" pitchFamily="34" charset="-122"/>
+                <a:cs typeface="Courier New" pitchFamily="34" charset="-120"/>
+              </a:rPr>
+              <a:t>(</a:t>
+            </a:r>
+            <a:r>
+              <a:rPr lang="en-US" sz="1000" i="0" dirty="0">
+                <a:solidFill>
+                  <a:srgbClr val="E8E6F0"/>
+                </a:solidFill>
+                <a:latin typeface="Courier New" pitchFamily="34" charset="0"/>
+                <a:ea typeface="Courier New" pitchFamily="34" charset="-122"/>
+                <a:cs typeface="Courier New" pitchFamily="34" charset="-120"/>
+              </a:rPr>
+              <a:t>adminUrl</a:t>
+            </a:r>
+            <a:r>
+              <a:rPr lang="en-US" sz="1000" i="0" dirty="0">
+                <a:solidFill>
+                  <a:srgbClr val="E8E6F0"/>
+                </a:solidFill>
+                <a:latin typeface="Courier New" pitchFamily="34" charset="0"/>
+                <a:ea typeface="Courier New" pitchFamily="34" charset="-122"/>
+                <a:cs typeface="Courier New" pitchFamily="34" charset="-120"/>
+              </a:rPr>
+              <a:t>)</a:t>
+            </a:r>
+            <a:r>
+              <a:rPr lang="en-US" sz="1000" i="0" dirty="0">
+                <a:solidFill>
+                  <a:srgbClr val="E8E6F0"/>
+                </a:solidFill>
+                <a:latin typeface="Courier New" pitchFamily="34" charset="0"/>
+                <a:ea typeface="Courier New" pitchFamily="34" charset="-122"/>
+                <a:cs typeface="Courier New" pitchFamily="34" charset="-120"/>
+              </a:rPr>
+              <a:t> </a:t>
+            </a:r>
+            <a:r>
+              <a:rPr lang="en-US" sz="1000" i="0" dirty="0">
+                <a:solidFill>
+                  <a:srgbClr val="E8E6F0"/>
+                </a:solidFill>
+                <a:latin typeface="Courier New" pitchFamily="34" charset="0"/>
+                <a:ea typeface="Courier New" pitchFamily="34" charset="-122"/>
+                <a:cs typeface="Courier New" pitchFamily="34" charset="-120"/>
+              </a:rPr>
+              <a:t>}</a:t>
+            </a:r>
+            <a:r>
+              <a:rPr lang="en-US" sz="1000" i="0" dirty="0">
+                <a:solidFill>
+                  <a:srgbClr val="E8E6F0"/>
+                </a:solidFill>
+                <a:latin typeface="Courier New" pitchFamily="34" charset="0"/>
+                <a:ea typeface="Courier New" pitchFamily="34" charset="-122"/>
+                <a:cs typeface="Courier New" pitchFamily="34" charset="-120"/>
+              </a:rPr>
+              <a:t>;</a:t>
+            </a:r>
+          </a:p>
+          <a:p>
+            <a:pPr indent="0" marL="0">
+              <a:buNone/>
+            </a:pPr>
+            <a:r>
+              <a:rPr lang="en-US" sz="1000" i="0" dirty="0">
+                <a:solidFill>
+                  <a:srgbClr val="E8E6F0"/>
+                </a:solidFill>
+                <a:latin typeface="Courier New" pitchFamily="34" charset="0"/>
+                <a:ea typeface="Courier New" pitchFamily="34" charset="-122"/>
+                <a:cs typeface="Courier New" pitchFamily="34" charset="-120"/>
+              </a:rPr>
+              <a:t> </a:t>
+            </a:r>
+          </a:p>
+          <a:p>
+            <a:pPr indent="0" marL="0">
+              <a:buNone/>
+            </a:pPr>
+            <a:r>
+              <a:rPr lang="en-US" sz="1000" i="0" dirty="0">
+                <a:solidFill>
+                  <a:srgbClr val="C4A7FF"/>
+                </a:solidFill>
+                <a:latin typeface="Courier New" pitchFamily="34" charset="0"/>
+                <a:ea typeface="Courier New" pitchFamily="34" charset="-122"/>
+                <a:cs typeface="Courier New" pitchFamily="34" charset="-120"/>
+              </a:rPr>
+              <a:t>while</a:t>
+            </a:r>
+            <a:r>
+              <a:rPr lang="en-US" sz="1000" i="0" dirty="0">
+                <a:solidFill>
+                  <a:srgbClr val="E8E6F0"/>
+                </a:solidFill>
+                <a:latin typeface="Courier New" pitchFamily="34" charset="0"/>
+                <a:ea typeface="Courier New" pitchFamily="34" charset="-122"/>
+                <a:cs typeface="Courier New" pitchFamily="34" charset="-120"/>
+              </a:rPr>
+              <a:t> </a:t>
+            </a:r>
+            <a:r>
+              <a:rPr lang="en-US" sz="1000" i="0" dirty="0">
+                <a:solidFill>
+                  <a:srgbClr val="E8E6F0"/>
+                </a:solidFill>
+                <a:latin typeface="Courier New" pitchFamily="34" charset="0"/>
+                <a:ea typeface="Courier New" pitchFamily="34" charset="-122"/>
+                <a:cs typeface="Courier New" pitchFamily="34" charset="-120"/>
+              </a:rPr>
+              <a:t>(</a:t>
+            </a:r>
+            <a:r>
+              <a:rPr lang="en-US" sz="1000" i="0" dirty="0">
+                <a:solidFill>
+                  <a:srgbClr val="C4A7FF"/>
+                </a:solidFill>
+                <a:latin typeface="Courier New" pitchFamily="34" charset="0"/>
+                <a:ea typeface="Courier New" pitchFamily="34" charset="-122"/>
+                <a:cs typeface="Courier New" pitchFamily="34" charset="-120"/>
+              </a:rPr>
+              <a:t>true</a:t>
+            </a:r>
+            <a:r>
+              <a:rPr lang="en-US" sz="1000" i="0" dirty="0">
+                <a:solidFill>
+                  <a:srgbClr val="E8E6F0"/>
+                </a:solidFill>
+                <a:latin typeface="Courier New" pitchFamily="34" charset="0"/>
+                <a:ea typeface="Courier New" pitchFamily="34" charset="-122"/>
+                <a:cs typeface="Courier New" pitchFamily="34" charset="-120"/>
+              </a:rPr>
+              <a:t>)</a:t>
+            </a:r>
+          </a:p>
+          <a:p>
+            <a:pPr indent="0" marL="0">
+              <a:buNone/>
+            </a:pPr>
+            <a:r>
+              <a:rPr lang="en-US" sz="1000" i="0" dirty="0">
+                <a:solidFill>
+                  <a:srgbClr val="E8E6F0"/>
+                </a:solidFill>
+                <a:latin typeface="Courier New" pitchFamily="34" charset="0"/>
+                <a:ea typeface="Courier New" pitchFamily="34" charset="-122"/>
+                <a:cs typeface="Courier New" pitchFamily="34" charset="-120"/>
+              </a:rPr>
+              <a:t>{</a:t>
+            </a:r>
+          </a:p>
+          <a:p>
+            <a:pPr indent="0" marL="0">
+              <a:buNone/>
+            </a:pPr>
+            <a:r>
+              <a:rPr lang="en-US" sz="1000" i="0" dirty="0">
+                <a:solidFill>
+                  <a:srgbClr val="E8E6F0"/>
+                </a:solidFill>
+                <a:latin typeface="Courier New" pitchFamily="34" charset="0"/>
+                <a:ea typeface="Courier New" pitchFamily="34" charset="-122"/>
+                <a:cs typeface="Courier New" pitchFamily="34" charset="-120"/>
+              </a:rPr>
+              <a:t>    </a:t>
+            </a:r>
+            <a:r>
+              <a:rPr lang="en-US" sz="1000" i="0" dirty="0">
+                <a:solidFill>
+                  <a:srgbClr val="7CC7FF"/>
+                </a:solidFill>
+                <a:latin typeface="Courier New" pitchFamily="34" charset="0"/>
+                <a:ea typeface="Courier New" pitchFamily="34" charset="-122"/>
+                <a:cs typeface="Courier New" pitchFamily="34" charset="-120"/>
+              </a:rPr>
+              <a:t>Console</a:t>
+            </a:r>
+            <a:r>
+              <a:rPr lang="en-US" sz="1000" i="0" dirty="0">
+                <a:solidFill>
+                  <a:srgbClr val="E8E6F0"/>
+                </a:solidFill>
+                <a:latin typeface="Courier New" pitchFamily="34" charset="0"/>
+                <a:ea typeface="Courier New" pitchFamily="34" charset="-122"/>
+                <a:cs typeface="Courier New" pitchFamily="34" charset="-120"/>
+              </a:rPr>
+              <a:t>.</a:t>
+            </a:r>
+            <a:r>
+              <a:rPr lang="en-US" sz="1000" i="0" dirty="0">
+                <a:solidFill>
+                  <a:srgbClr val="E8E6F0"/>
+                </a:solidFill>
+                <a:latin typeface="Courier New" pitchFamily="34" charset="0"/>
+                <a:ea typeface="Courier New" pitchFamily="34" charset="-122"/>
+                <a:cs typeface="Courier New" pitchFamily="34" charset="-120"/>
+              </a:rPr>
+              <a:t>Write</a:t>
+            </a:r>
+            <a:r>
+              <a:rPr lang="en-US" sz="1000" i="0" dirty="0">
+                <a:solidFill>
+                  <a:srgbClr val="E8E6F0"/>
+                </a:solidFill>
+                <a:latin typeface="Courier New" pitchFamily="34" charset="0"/>
+                <a:ea typeface="Courier New" pitchFamily="34" charset="-122"/>
+                <a:cs typeface="Courier New" pitchFamily="34" charset="-120"/>
+              </a:rPr>
+              <a:t>(</a:t>
+            </a:r>
+            <a:r>
+              <a:rPr lang="en-US" sz="1000" i="0" dirty="0">
+                <a:solidFill>
+                  <a:srgbClr val="8FE3B0"/>
+                </a:solidFill>
+                <a:latin typeface="Courier New" pitchFamily="34" charset="0"/>
+                <a:ea typeface="Courier New" pitchFamily="34" charset="-122"/>
+                <a:cs typeface="Courier New" pitchFamily="34" charset="-120"/>
+              </a:rPr>
+              <a:t>"\nproducer&gt; "</a:t>
+            </a:r>
+            <a:r>
+              <a:rPr lang="en-US" sz="1000" i="0" dirty="0">
+                <a:solidFill>
+                  <a:srgbClr val="E8E6F0"/>
+                </a:solidFill>
+                <a:latin typeface="Courier New" pitchFamily="34" charset="0"/>
+                <a:ea typeface="Courier New" pitchFamily="34" charset="-122"/>
+                <a:cs typeface="Courier New" pitchFamily="34" charset="-120"/>
+              </a:rPr>
+              <a:t>)</a:t>
+            </a:r>
+            <a:r>
+              <a:rPr lang="en-US" sz="1000" i="0" dirty="0">
+                <a:solidFill>
+                  <a:srgbClr val="E8E6F0"/>
+                </a:solidFill>
+                <a:latin typeface="Courier New" pitchFamily="34" charset="0"/>
+                <a:ea typeface="Courier New" pitchFamily="34" charset="-122"/>
+                <a:cs typeface="Courier New" pitchFamily="34" charset="-120"/>
+              </a:rPr>
+              <a:t>;</a:t>
+            </a:r>
+          </a:p>
+          <a:p>
+            <a:pPr indent="0" marL="0">
+              <a:buNone/>
+            </a:pPr>
+            <a:r>
+              <a:rPr lang="en-US" sz="1000" i="0" dirty="0">
+                <a:solidFill>
+                  <a:srgbClr val="E8E6F0"/>
+                </a:solidFill>
+                <a:latin typeface="Courier New" pitchFamily="34" charset="0"/>
+                <a:ea typeface="Courier New" pitchFamily="34" charset="-122"/>
+                <a:cs typeface="Courier New" pitchFamily="34" charset="-120"/>
+              </a:rPr>
+              <a:t>    </a:t>
+            </a:r>
+            <a:r>
+              <a:rPr lang="en-US" sz="1000" i="0" dirty="0">
+                <a:solidFill>
+                  <a:srgbClr val="C4A7FF"/>
+                </a:solidFill>
+                <a:latin typeface="Courier New" pitchFamily="34" charset="0"/>
+                <a:ea typeface="Courier New" pitchFamily="34" charset="-122"/>
+                <a:cs typeface="Courier New" pitchFamily="34" charset="-120"/>
+              </a:rPr>
+              <a:t>var</a:t>
+            </a:r>
+            <a:r>
+              <a:rPr lang="en-US" sz="1000" i="0" dirty="0">
+                <a:solidFill>
+                  <a:srgbClr val="E8E6F0"/>
+                </a:solidFill>
+                <a:latin typeface="Courier New" pitchFamily="34" charset="0"/>
+                <a:ea typeface="Courier New" pitchFamily="34" charset="-122"/>
+                <a:cs typeface="Courier New" pitchFamily="34" charset="-120"/>
+              </a:rPr>
+              <a:t> </a:t>
+            </a:r>
+            <a:r>
+              <a:rPr lang="en-US" sz="1000" i="0" dirty="0">
+                <a:solidFill>
+                  <a:srgbClr val="E8E6F0"/>
+                </a:solidFill>
+                <a:latin typeface="Courier New" pitchFamily="34" charset="0"/>
+                <a:ea typeface="Courier New" pitchFamily="34" charset="-122"/>
+                <a:cs typeface="Courier New" pitchFamily="34" charset="-120"/>
+              </a:rPr>
+              <a:t>input</a:t>
+            </a:r>
+            <a:r>
+              <a:rPr lang="en-US" sz="1000" i="0" dirty="0">
+                <a:solidFill>
+                  <a:srgbClr val="E8E6F0"/>
+                </a:solidFill>
+                <a:latin typeface="Courier New" pitchFamily="34" charset="0"/>
+                <a:ea typeface="Courier New" pitchFamily="34" charset="-122"/>
+                <a:cs typeface="Courier New" pitchFamily="34" charset="-120"/>
+              </a:rPr>
+              <a:t> </a:t>
+            </a:r>
+            <a:r>
+              <a:rPr lang="en-US" sz="1000" i="0" dirty="0">
+                <a:solidFill>
+                  <a:srgbClr val="E8E6F0"/>
+                </a:solidFill>
+                <a:latin typeface="Courier New" pitchFamily="34" charset="0"/>
+                <a:ea typeface="Courier New" pitchFamily="34" charset="-122"/>
+                <a:cs typeface="Courier New" pitchFamily="34" charset="-120"/>
+              </a:rPr>
+              <a:t>=</a:t>
+            </a:r>
+            <a:r>
+              <a:rPr lang="en-US" sz="1000" i="0" dirty="0">
+                <a:solidFill>
+                  <a:srgbClr val="E8E6F0"/>
+                </a:solidFill>
+                <a:latin typeface="Courier New" pitchFamily="34" charset="0"/>
+                <a:ea typeface="Courier New" pitchFamily="34" charset="-122"/>
+                <a:cs typeface="Courier New" pitchFamily="34" charset="-120"/>
+              </a:rPr>
+              <a:t> </a:t>
+            </a:r>
+            <a:r>
+              <a:rPr lang="en-US" sz="1000" i="0" dirty="0">
+                <a:solidFill>
+                  <a:srgbClr val="7CC7FF"/>
+                </a:solidFill>
+                <a:latin typeface="Courier New" pitchFamily="34" charset="0"/>
+                <a:ea typeface="Courier New" pitchFamily="34" charset="-122"/>
+                <a:cs typeface="Courier New" pitchFamily="34" charset="-120"/>
+              </a:rPr>
+              <a:t>Console</a:t>
+            </a:r>
+            <a:r>
+              <a:rPr lang="en-US" sz="1000" i="0" dirty="0">
+                <a:solidFill>
+                  <a:srgbClr val="E8E6F0"/>
+                </a:solidFill>
+                <a:latin typeface="Courier New" pitchFamily="34" charset="0"/>
+                <a:ea typeface="Courier New" pitchFamily="34" charset="-122"/>
+                <a:cs typeface="Courier New" pitchFamily="34" charset="-120"/>
+              </a:rPr>
+              <a:t>.</a:t>
+            </a:r>
+            <a:r>
+              <a:rPr lang="en-US" sz="1000" i="0" dirty="0">
+                <a:solidFill>
+                  <a:srgbClr val="E8E6F0"/>
+                </a:solidFill>
+                <a:latin typeface="Courier New" pitchFamily="34" charset="0"/>
+                <a:ea typeface="Courier New" pitchFamily="34" charset="-122"/>
+                <a:cs typeface="Courier New" pitchFamily="34" charset="-120"/>
+              </a:rPr>
+              <a:t>ReadLine</a:t>
+            </a:r>
+            <a:r>
+              <a:rPr lang="en-US" sz="1000" i="0" dirty="0">
+                <a:solidFill>
+                  <a:srgbClr val="E8E6F0"/>
+                </a:solidFill>
+                <a:latin typeface="Courier New" pitchFamily="34" charset="0"/>
+                <a:ea typeface="Courier New" pitchFamily="34" charset="-122"/>
+                <a:cs typeface="Courier New" pitchFamily="34" charset="-120"/>
+              </a:rPr>
+              <a:t>(</a:t>
+            </a:r>
+            <a:r>
+              <a:rPr lang="en-US" sz="1000" i="0" dirty="0">
+                <a:solidFill>
+                  <a:srgbClr val="E8E6F0"/>
+                </a:solidFill>
+                <a:latin typeface="Courier New" pitchFamily="34" charset="0"/>
+                <a:ea typeface="Courier New" pitchFamily="34" charset="-122"/>
+                <a:cs typeface="Courier New" pitchFamily="34" charset="-120"/>
+              </a:rPr>
+              <a:t>)</a:t>
+            </a:r>
+            <a:r>
+              <a:rPr lang="en-US" sz="1000" i="0" dirty="0">
+                <a:solidFill>
+                  <a:srgbClr val="E8E6F0"/>
+                </a:solidFill>
+                <a:latin typeface="Courier New" pitchFamily="34" charset="0"/>
+                <a:ea typeface="Courier New" pitchFamily="34" charset="-122"/>
+                <a:cs typeface="Courier New" pitchFamily="34" charset="-120"/>
+              </a:rPr>
+              <a:t>?</a:t>
+            </a:r>
+            <a:r>
+              <a:rPr lang="en-US" sz="1000" i="0" dirty="0">
+                <a:solidFill>
+                  <a:srgbClr val="E8E6F0"/>
+                </a:solidFill>
+                <a:latin typeface="Courier New" pitchFamily="34" charset="0"/>
+                <a:ea typeface="Courier New" pitchFamily="34" charset="-122"/>
+                <a:cs typeface="Courier New" pitchFamily="34" charset="-120"/>
+              </a:rPr>
+              <a:t>.</a:t>
+            </a:r>
+            <a:r>
+              <a:rPr lang="en-US" sz="1000" i="0" dirty="0">
+                <a:solidFill>
+                  <a:srgbClr val="E8E6F0"/>
+                </a:solidFill>
+                <a:latin typeface="Courier New" pitchFamily="34" charset="0"/>
+                <a:ea typeface="Courier New" pitchFamily="34" charset="-122"/>
+                <a:cs typeface="Courier New" pitchFamily="34" charset="-120"/>
+              </a:rPr>
+              <a:t>Trim</a:t>
+            </a:r>
+            <a:r>
+              <a:rPr lang="en-US" sz="1000" i="0" dirty="0">
+                <a:solidFill>
+                  <a:srgbClr val="E8E6F0"/>
+                </a:solidFill>
+                <a:latin typeface="Courier New" pitchFamily="34" charset="0"/>
+                <a:ea typeface="Courier New" pitchFamily="34" charset="-122"/>
+                <a:cs typeface="Courier New" pitchFamily="34" charset="-120"/>
+              </a:rPr>
+              <a:t>(</a:t>
+            </a:r>
+            <a:r>
+              <a:rPr lang="en-US" sz="1000" i="0" dirty="0">
+                <a:solidFill>
+                  <a:srgbClr val="E8E6F0"/>
+                </a:solidFill>
+                <a:latin typeface="Courier New" pitchFamily="34" charset="0"/>
+                <a:ea typeface="Courier New" pitchFamily="34" charset="-122"/>
+                <a:cs typeface="Courier New" pitchFamily="34" charset="-120"/>
+              </a:rPr>
+              <a:t>)</a:t>
+            </a:r>
+            <a:r>
+              <a:rPr lang="en-US" sz="1000" i="0" dirty="0">
+                <a:solidFill>
+                  <a:srgbClr val="E8E6F0"/>
+                </a:solidFill>
+                <a:latin typeface="Courier New" pitchFamily="34" charset="0"/>
+                <a:ea typeface="Courier New" pitchFamily="34" charset="-122"/>
+                <a:cs typeface="Courier New" pitchFamily="34" charset="-120"/>
+              </a:rPr>
+              <a:t>;</a:t>
+            </a:r>
+          </a:p>
+          <a:p>
+            <a:pPr indent="0" marL="0">
+              <a:buNone/>
+            </a:pPr>
+            <a:r>
+              <a:rPr lang="en-US" sz="1000" i="0" dirty="0">
+                <a:solidFill>
+                  <a:srgbClr val="E8E6F0"/>
+                </a:solidFill>
+                <a:latin typeface="Courier New" pitchFamily="34" charset="0"/>
+                <a:ea typeface="Courier New" pitchFamily="34" charset="-122"/>
+                <a:cs typeface="Courier New" pitchFamily="34" charset="-120"/>
+              </a:rPr>
+              <a:t>    </a:t>
+            </a:r>
+            <a:r>
+              <a:rPr lang="en-US" sz="1000" i="1" dirty="0">
+                <a:solidFill>
+                  <a:srgbClr val="8B87A3"/>
+                </a:solidFill>
+                <a:latin typeface="Courier New" pitchFamily="34" charset="0"/>
+                <a:ea typeface="Courier New" pitchFamily="34" charset="-122"/>
+                <a:cs typeface="Courier New" pitchFamily="34" charset="-120"/>
+              </a:rPr>
+              <a:t>// status, call &lt;square-id&gt;, clear &lt;square-id&gt;, help, quit</a:t>
+            </a:r>
+          </a:p>
+          <a:p>
+            <a:pPr indent="0" marL="0">
+              <a:buNone/>
+            </a:pPr>
+            <a:r>
+              <a:rPr lang="en-US" sz="1000" i="0" dirty="0">
+                <a:solidFill>
+                  <a:srgbClr val="E8E6F0"/>
+                </a:solidFill>
+                <a:latin typeface="Courier New" pitchFamily="34" charset="0"/>
+                <a:ea typeface="Courier New" pitchFamily="34" charset="-122"/>
+                <a:cs typeface="Courier New" pitchFamily="34" charset="-120"/>
+              </a:rPr>
+              <a:t>}</a:t>
+            </a:r>
+          </a:p>
+        </p:txBody>
+      </p:sp>
+      <p:sp>
+        <p:nvSpPr>
+          <p:cNvPr id="9" name="TS notes panel"/>
+          <p:cNvSpPr/>
+          <p:nvPr/>
+        </p:nvSpPr>
+        <p:spPr>
+          <a:xfrm>
+            <a:off x="7772400" y="1325880"/>
+            <a:ext cx="3840480" cy="4709160"/>
+          </a:xfrm>
+          <a:prstGeom prst="roundRect">
+            <a:avLst>
+              <a:gd name="adj" fmla="val 2381"/>
+            </a:avLst>
+          </a:prstGeom>
+          <a:solidFill>
+            <a:schemeClr val="bg2"/>
+          </a:solidFill>
+          <a:ln w="12700">
+            <a:solidFill>
+              <a:schemeClr val="bg2"/>
+            </a:solidFill>
+            <a:prstDash val="solid"/>
+          </a:ln>
+        </p:spPr>
+        <p:txBody>
+          <a:bodyPr/>
+          <a:p/>
+        </p:txBody>
+      </p:sp>
+      <p:sp>
+        <p:nvSpPr>
+          <p:cNvPr id="10" name="TS notes text"/>
+          <p:cNvSpPr txBox="1"/>
+          <p:nvPr/>
+        </p:nvSpPr>
+        <p:spPr>
+          <a:xfrm>
+            <a:off x="8046720" y="1554480"/>
+            <a:ext cx="3291840" cy="4389120"/>
+          </a:xfrm>
+          <a:prstGeom prst="rect">
+            <a:avLst/>
+          </a:prstGeom>
+          <a:noFill/>
+          <a:ln/>
+        </p:spPr>
+        <p:txBody>
+          <a:bodyPr wrap="square" lIns="0" tIns="0" rIns="0" bIns="0" rtlCol="0" anchor="t"/>
+          <a:lstStyle/>
+          <a:p>
+            <a:pPr indent="0" marL="0">
+              <a:buNone/>
+            </a:pPr>
+            <a:r>
+              <a:rPr lang="en-US" sz="1400" b="1" dirty="0">
+                <a:solidFill>
+                  <a:schemeClr val="tx2"/>
+                </a:solidFill>
+              </a:rPr>
+              <a:t>AddCSharpApp</a:t>
+            </a:r>
+            <a:endParaRPr lang="en-US" sz="1500" dirty="0"/>
+          </a:p>
+          <a:p>
+            <a:pPr indent="0" marL="0">
+              <a:spcAft>
+                <a:spcPts val="1200"/>
+              </a:spcAft>
+              <a:buNone/>
+            </a:pPr>
+            <a:r>
+              <a:rPr lang="en-US" sz="1300" dirty="0">
+                <a:solidFill>
+                  <a:schemeClr val="tx1"/>
+                </a:solidFill>
+              </a:rPr>
+              <a:t>One .cs file runs as resource. No .csproj. Needs .NET 10 SDK.</a:t>
+            </a:r>
+            <a:endParaRPr lang="en-US" sz="1500" dirty="0"/>
+          </a:p>
+          <a:p>
+            <a:pPr indent="0" marL="0">
+              <a:buNone/>
+            </a:pPr>
+            <a:r>
+              <a:rPr lang="en-US" sz="1400" b="1" dirty="0">
+                <a:solidFill>
+                  <a:schemeClr val="tx2"/>
+                </a:solidFill>
+              </a:rPr>
+              <a:t>WithReference(admin)</a:t>
+            </a:r>
+            <a:endParaRPr lang="en-US" sz="1500" dirty="0"/>
+          </a:p>
+          <a:p>
+            <a:pPr indent="0" marL="0">
+              <a:spcAft>
+                <a:spcPts val="1200"/>
+              </a:spcAft>
+              <a:buNone/>
+            </a:pPr>
+            <a:r>
+              <a:rPr lang="en-US" sz="1300" dirty="0">
+                <a:solidFill>
+                  <a:schemeClr val="tx1"/>
+                </a:solidFill>
+              </a:rPr>
+              <a:t>Console finds admin API via services__boardadmin__https__0. Same env vars as WithReference slide.</a:t>
+            </a:r>
+            <a:endParaRPr lang="en-US" sz="1500" dirty="0"/>
+          </a:p>
+          <a:p>
+            <a:pPr indent="0" marL="0">
+              <a:buNone/>
+            </a:pPr>
+            <a:r>
+              <a:rPr lang="en-US" sz="1400" b="1" dirty="0">
+                <a:solidFill>
+                  <a:schemeClr val="tx2"/>
+                </a:solidFill>
+              </a:rPr>
+              <a:t>WithTerminal()</a:t>
+            </a:r>
+            <a:endParaRPr lang="en-US" sz="1500" dirty="0"/>
+          </a:p>
+          <a:p>
+            <a:pPr indent="0" marL="0">
+              <a:spcAft>
+                <a:spcPts val="1200"/>
+              </a:spcAft>
+              <a:buNone/>
+            </a:pPr>
+            <a:r>
+              <a:rPr lang="en-US" sz="1300" dirty="0">
+                <a:solidFill>
+                  <a:schemeClr val="tx1"/>
+                </a:solidFill>
+              </a:rPr>
+              <a:t>Console waits on ReadLine(). Type status, call, clear from dashboard.</a:t>
+            </a:r>
+            <a:endParaRPr lang="en-US" sz="1500" dirty="0"/>
+          </a:p>
+          <a:p>
+            <a:pPr indent="0" marL="0">
+              <a:buNone/>
+            </a:pPr>
+            <a:r>
+              <a:rPr lang="en-US" sz="1400" b="1" dirty="0">
+                <a:solidFill>
+                  <a:schemeClr val="tx2"/>
+                </a:solidFill>
+              </a:rPr>
+              <a:t>Experimental</a:t>
+            </a:r>
+            <a:endParaRPr lang="en-US" sz="1500" dirty="0"/>
+          </a:p>
+          <a:p>
+            <a:pPr indent="0" marL="0">
+              <a:spcAft>
+                <a:spcPts val="1200"/>
+              </a:spcAft>
+              <a:buNone/>
+            </a:pPr>
+            <a:r>
+              <a:rPr lang="en-US" sz="1300" dirty="0">
+                <a:solidFill>
+                  <a:schemeClr val="tx1"/>
+                </a:solidFill>
+              </a:rPr>
+              <a:t>Both APIs. Suppress ASPIRECSHARPAPPS001 and ASPIRETERMINAL001.</a:t>
+            </a:r>
+            <a:endParaRPr lang="en-US" sz="1500" dirty="0"/>
           </a:p>
         </p:txBody>
       </p:sp>
@@ -14386,515 +16426,9 @@
             <a:pPr algn="r"/>
             <a:fld id="{F7021451-1387-4CA6-816F-3879F97B5CBC}" type="slidenum">
               <a:rPr b="0" lang="en-US"/>
-              <a:t>19</a:t>
+              <a:t>20</a:t>
             </a:fld>
             <a:endParaRPr lang="en-US"/>
-          </a:p>
-        </p:txBody>
-      </p:sp>
-      <p:pic>
-        <p:nvPicPr>
-          <p:cNvPr id="26" name="Dashboard screenshot" descr="The Aspire 13.5 dashboard Console logs page showing a live terminal running the guessing-game resource"/>
-          <p:cNvPicPr>
-            <a:picLocks noChangeAspect="1"/>
-          </p:cNvPicPr>
-          <p:nvPr/>
-        </p:nvPicPr>
-        <p:blipFill>
-          <a:blip r:embed="rId3"/>
-          <a:stretch>
-            <a:fillRect/>
-          </a:stretch>
-        </p:blipFill>
-        <p:spPr>
-          <a:xfrm>
-            <a:off x="548640" y="1280160"/>
-            <a:ext cx="7168896" cy="4480560"/>
-          </a:xfrm>
-          <a:prstGeom prst="rect">
-            <a:avLst/>
-          </a:prstGeom>
-          <a:ln w="12700">
-            <a:solidFill>
-              <a:srgbClr val="D9D6E8"/>
-            </a:solidFill>
-          </a:ln>
-        </p:spPr>
-      </p:pic>
-      <p:sp>
-        <p:nvSpPr>
-          <p:cNvPr id="1001" name="Step circle 1"/>
-          <p:cNvSpPr/>
-          <p:nvPr/>
-        </p:nvSpPr>
-        <p:spPr>
-          <a:xfrm>
-            <a:off x="8503920" y="1325880"/>
-            <a:ext cx="347472" cy="347472"/>
-          </a:xfrm>
-          <a:prstGeom prst="ellipse">
-            <a:avLst/>
-          </a:prstGeom>
-          <a:solidFill>
-            <a:schemeClr val="accent1"/>
-          </a:solidFill>
-          <a:ln w="12700">
-            <a:solidFill>
-              <a:schemeClr val="accent1"/>
-            </a:solidFill>
-            <a:prstDash val="solid"/>
-          </a:ln>
-        </p:spPr>
-        <p:txBody>
-          <a:bodyPr/>
-          <a:p/>
-        </p:txBody>
-      </p:sp>
-      <p:sp>
-        <p:nvSpPr>
-          <p:cNvPr id="1002" name="Step number 1"/>
-          <p:cNvSpPr txBox="1"/>
-          <p:nvPr/>
-        </p:nvSpPr>
-        <p:spPr>
-          <a:xfrm>
-            <a:off x="8503920" y="1325880"/>
-            <a:ext cx="347472" cy="347472"/>
-          </a:xfrm>
-          <a:prstGeom prst="rect">
-            <a:avLst/>
-          </a:prstGeom>
-          <a:noFill/>
-          <a:ln/>
-        </p:spPr>
-        <p:txBody>
-          <a:bodyPr wrap="square" lIns="0" tIns="0" rIns="0" bIns="0" rtlCol="0" anchor="ctr"/>
-          <a:lstStyle/>
-          <a:p>
-            <a:pPr algn="ctr" indent="0" marL="0">
-              <a:buNone/>
-            </a:pPr>
-            <a:r>
-              <a:rPr lang="en-US" sz="1400" b="1" dirty="0">
-                <a:solidFill>
-                  <a:schemeClr val="bg1"/>
-                </a:solidFill>
-                <a:latin typeface="Calibri" pitchFamily="34" charset="0"/>
-                <a:ea typeface="Calibri" pitchFamily="34" charset="-122"/>
-                <a:cs typeface="Calibri" pitchFamily="34" charset="-120"/>
-              </a:rPr>
-              <a:t>1</a:t>
-            </a:r>
-            <a:endParaRPr lang="en-US" sz="1400" dirty="0"/>
-          </a:p>
-        </p:txBody>
-      </p:sp>
-      <p:sp>
-        <p:nvSpPr>
-          <p:cNvPr id="1003" name="Step title 1"/>
-          <p:cNvSpPr txBox="1"/>
-          <p:nvPr/>
-        </p:nvSpPr>
-        <p:spPr>
-          <a:xfrm>
-            <a:off x="8961120" y="1325880"/>
-            <a:ext cx="2743200" cy="347472"/>
-          </a:xfrm>
-          <a:prstGeom prst="rect">
-            <a:avLst/>
-          </a:prstGeom>
-          <a:noFill/>
-          <a:ln/>
-        </p:spPr>
-        <p:txBody>
-          <a:bodyPr wrap="square" lIns="0" tIns="0" rIns="0" bIns="0" rtlCol="0" anchor="ctr"/>
-          <a:lstStyle/>
-          <a:p>
-            <a:pPr indent="0" marL="0">
-              <a:buNone/>
-            </a:pPr>
-            <a:r>
-              <a:rPr lang="en-US" sz="1500" b="1" dirty="0">
-                <a:solidFill>
-                  <a:schemeClr val="tx2"/>
-                </a:solidFill>
-                <a:latin typeface="Calibri" pitchFamily="34" charset="0"/>
-                <a:ea typeface="Calibri" pitchFamily="34" charset="-122"/>
-                <a:cs typeface="Calibri" pitchFamily="34" charset="-120"/>
-              </a:rPr>
-              <a:t>Open Console logs</a:t>
-            </a:r>
-            <a:endParaRPr lang="en-US" sz="1500" dirty="0"/>
-          </a:p>
-        </p:txBody>
-      </p:sp>
-      <p:sp>
-        <p:nvSpPr>
-          <p:cNvPr id="1004" name="Step body 1"/>
-          <p:cNvSpPr txBox="1"/>
-          <p:nvPr/>
-        </p:nvSpPr>
-        <p:spPr>
-          <a:xfrm>
-            <a:off x="8961120" y="1709928"/>
-            <a:ext cx="2743200" cy="1005840"/>
-          </a:xfrm>
-          <a:prstGeom prst="rect">
-            <a:avLst/>
-          </a:prstGeom>
-          <a:noFill/>
-          <a:ln/>
-        </p:spPr>
-        <p:txBody>
-          <a:bodyPr wrap="square" lIns="0" tIns="0" rIns="0" bIns="0" rtlCol="0" anchor="t"/>
-          <a:lstStyle/>
-          <a:p>
-            <a:pPr indent="0" marL="0">
-              <a:buNone/>
-            </a:pPr>
-            <a:r>
-              <a:rPr lang="en-US" sz="1300" dirty="0">
-                <a:solidFill>
-                  <a:schemeClr val="tx1"/>
-                </a:solidFill>
-                <a:latin typeface="Calibri" pitchFamily="34" charset="0"/>
-                <a:ea typeface="Calibri" pitchFamily="34" charset="-122"/>
-                <a:cs typeface="Calibri" pitchFamily="34" charset="-120"/>
-              </a:rPr>
-              <a:t>Pick resource from Resource dropdown (here: guessing-game).</a:t>
-            </a:r>
-            <a:endParaRPr lang="en-US" sz="1300" dirty="0"/>
-          </a:p>
-        </p:txBody>
-      </p:sp>
-      <p:sp>
-        <p:nvSpPr>
-          <p:cNvPr id="1005" name="Step circle 2"/>
-          <p:cNvSpPr/>
-          <p:nvPr/>
-        </p:nvSpPr>
-        <p:spPr>
-          <a:xfrm>
-            <a:off x="8503920" y="2788920"/>
-            <a:ext cx="347472" cy="347472"/>
-          </a:xfrm>
-          <a:prstGeom prst="ellipse">
-            <a:avLst/>
-          </a:prstGeom>
-          <a:solidFill>
-            <a:schemeClr val="accent1"/>
-          </a:solidFill>
-          <a:ln w="12700">
-            <a:solidFill>
-              <a:schemeClr val="accent1"/>
-            </a:solidFill>
-            <a:prstDash val="solid"/>
-          </a:ln>
-        </p:spPr>
-        <p:txBody>
-          <a:bodyPr/>
-          <a:p/>
-        </p:txBody>
-      </p:sp>
-      <p:sp>
-        <p:nvSpPr>
-          <p:cNvPr id="1006" name="Step number 2"/>
-          <p:cNvSpPr txBox="1"/>
-          <p:nvPr/>
-        </p:nvSpPr>
-        <p:spPr>
-          <a:xfrm>
-            <a:off x="8503920" y="2788920"/>
-            <a:ext cx="347472" cy="347472"/>
-          </a:xfrm>
-          <a:prstGeom prst="rect">
-            <a:avLst/>
-          </a:prstGeom>
-          <a:noFill/>
-          <a:ln/>
-        </p:spPr>
-        <p:txBody>
-          <a:bodyPr wrap="square" lIns="0" tIns="0" rIns="0" bIns="0" rtlCol="0" anchor="ctr"/>
-          <a:lstStyle/>
-          <a:p>
-            <a:pPr algn="ctr" indent="0" marL="0">
-              <a:buNone/>
-            </a:pPr>
-            <a:r>
-              <a:rPr lang="en-US" sz="1400" b="1" dirty="0">
-                <a:solidFill>
-                  <a:schemeClr val="bg1"/>
-                </a:solidFill>
-                <a:latin typeface="Calibri" pitchFamily="34" charset="0"/>
-                <a:ea typeface="Calibri" pitchFamily="34" charset="-122"/>
-                <a:cs typeface="Calibri" pitchFamily="34" charset="-120"/>
-              </a:rPr>
-              <a:t>2</a:t>
-            </a:r>
-            <a:endParaRPr lang="en-US" sz="1400" dirty="0"/>
-          </a:p>
-        </p:txBody>
-      </p:sp>
-      <p:sp>
-        <p:nvSpPr>
-          <p:cNvPr id="1007" name="Step title 2"/>
-          <p:cNvSpPr txBox="1"/>
-          <p:nvPr/>
-        </p:nvSpPr>
-        <p:spPr>
-          <a:xfrm>
-            <a:off x="8961120" y="2788920"/>
-            <a:ext cx="2743200" cy="347472"/>
-          </a:xfrm>
-          <a:prstGeom prst="rect">
-            <a:avLst/>
-          </a:prstGeom>
-          <a:noFill/>
-          <a:ln/>
-        </p:spPr>
-        <p:txBody>
-          <a:bodyPr wrap="square" lIns="0" tIns="0" rIns="0" bIns="0" rtlCol="0" anchor="ctr"/>
-          <a:lstStyle/>
-          <a:p>
-            <a:pPr indent="0" marL="0">
-              <a:buNone/>
-            </a:pPr>
-            <a:r>
-              <a:rPr lang="en-US" sz="1500" b="1" dirty="0">
-                <a:solidFill>
-                  <a:schemeClr val="tx2"/>
-                </a:solidFill>
-                <a:latin typeface="Calibri" pitchFamily="34" charset="0"/>
-                <a:ea typeface="Calibri" pitchFamily="34" charset="-122"/>
-                <a:cs typeface="Calibri" pitchFamily="34" charset="-120"/>
-              </a:rPr>
-              <a:t>Live terminal shows</a:t>
-            </a:r>
-            <a:endParaRPr lang="en-US" sz="1500" dirty="0"/>
-          </a:p>
-        </p:txBody>
-      </p:sp>
-      <p:sp>
-        <p:nvSpPr>
-          <p:cNvPr id="1008" name="Step body 2"/>
-          <p:cNvSpPr txBox="1"/>
-          <p:nvPr/>
-        </p:nvSpPr>
-        <p:spPr>
-          <a:xfrm>
-            <a:off x="8961120" y="3172968"/>
-            <a:ext cx="2743200" cy="1005840"/>
-          </a:xfrm>
-          <a:prstGeom prst="rect">
-            <a:avLst/>
-          </a:prstGeom>
-          <a:noFill/>
-          <a:ln/>
-        </p:spPr>
-        <p:txBody>
-          <a:bodyPr wrap="square" lIns="0" tIns="0" rIns="0" bIns="0" rtlCol="0" anchor="t"/>
-          <a:lstStyle/>
-          <a:p>
-            <a:pPr indent="0" marL="0">
-              <a:buNone/>
-            </a:pPr>
-            <a:r>
-              <a:rPr lang="en-US" sz="1300" dirty="0">
-                <a:solidFill>
-                  <a:schemeClr val="tx1"/>
-                </a:solidFill>
-                <a:latin typeface="Calibri" pitchFamily="34" charset="0"/>
-                <a:ea typeface="Calibri" pitchFamily="34" charset="-122"/>
-                <a:cs typeface="Calibri" pitchFamily="34" charset="-120"/>
-              </a:rPr>
-              <a:t>Resource with WithTerminal() gets interactive session. Switch replicas or back to logs without stopping it.</a:t>
-            </a:r>
-            <a:endParaRPr lang="en-US" sz="1300" dirty="0"/>
-          </a:p>
-        </p:txBody>
-      </p:sp>
-      <p:sp>
-        <p:nvSpPr>
-          <p:cNvPr id="1009" name="Step circle 3"/>
-          <p:cNvSpPr/>
-          <p:nvPr/>
-        </p:nvSpPr>
-        <p:spPr>
-          <a:xfrm>
-            <a:off x="8503920" y="4251960"/>
-            <a:ext cx="347472" cy="347472"/>
-          </a:xfrm>
-          <a:prstGeom prst="ellipse">
-            <a:avLst/>
-          </a:prstGeom>
-          <a:solidFill>
-            <a:schemeClr val="accent1"/>
-          </a:solidFill>
-          <a:ln w="12700">
-            <a:solidFill>
-              <a:schemeClr val="accent1"/>
-            </a:solidFill>
-            <a:prstDash val="solid"/>
-          </a:ln>
-        </p:spPr>
-        <p:txBody>
-          <a:bodyPr/>
-          <a:p/>
-        </p:txBody>
-      </p:sp>
-      <p:sp>
-        <p:nvSpPr>
-          <p:cNvPr id="1010" name="Step number 3"/>
-          <p:cNvSpPr txBox="1"/>
-          <p:nvPr/>
-        </p:nvSpPr>
-        <p:spPr>
-          <a:xfrm>
-            <a:off x="8503920" y="4251960"/>
-            <a:ext cx="347472" cy="347472"/>
-          </a:xfrm>
-          <a:prstGeom prst="rect">
-            <a:avLst/>
-          </a:prstGeom>
-          <a:noFill/>
-          <a:ln/>
-        </p:spPr>
-        <p:txBody>
-          <a:bodyPr wrap="square" lIns="0" tIns="0" rIns="0" bIns="0" rtlCol="0" anchor="ctr"/>
-          <a:lstStyle/>
-          <a:p>
-            <a:pPr algn="ctr" indent="0" marL="0">
-              <a:buNone/>
-            </a:pPr>
-            <a:r>
-              <a:rPr lang="en-US" sz="1400" b="1" dirty="0">
-                <a:solidFill>
-                  <a:schemeClr val="bg1"/>
-                </a:solidFill>
-                <a:latin typeface="Calibri" pitchFamily="34" charset="0"/>
-                <a:ea typeface="Calibri" pitchFamily="34" charset="-122"/>
-                <a:cs typeface="Calibri" pitchFamily="34" charset="-120"/>
-              </a:rPr>
-              <a:t>3</a:t>
-            </a:r>
-            <a:endParaRPr lang="en-US" sz="1400" dirty="0"/>
-          </a:p>
-        </p:txBody>
-      </p:sp>
-      <p:sp>
-        <p:nvSpPr>
-          <p:cNvPr id="1011" name="Step title 3"/>
-          <p:cNvSpPr txBox="1"/>
-          <p:nvPr/>
-        </p:nvSpPr>
-        <p:spPr>
-          <a:xfrm>
-            <a:off x="8961120" y="4251960"/>
-            <a:ext cx="2743200" cy="347472"/>
-          </a:xfrm>
-          <a:prstGeom prst="rect">
-            <a:avLst/>
-          </a:prstGeom>
-          <a:noFill/>
-          <a:ln/>
-        </p:spPr>
-        <p:txBody>
-          <a:bodyPr wrap="square" lIns="0" tIns="0" rIns="0" bIns="0" rtlCol="0" anchor="ctr"/>
-          <a:lstStyle/>
-          <a:p>
-            <a:pPr indent="0" marL="0">
-              <a:buNone/>
-            </a:pPr>
-            <a:r>
-              <a:rPr lang="en-US" sz="1500" b="1" dirty="0">
-                <a:solidFill>
-                  <a:schemeClr val="tx2"/>
-                </a:solidFill>
-                <a:latin typeface="Calibri" pitchFamily="34" charset="0"/>
-                <a:ea typeface="Calibri" pitchFamily="34" charset="-122"/>
-                <a:cs typeface="Calibri" pitchFamily="34" charset="-120"/>
-              </a:rPr>
-              <a:t>Type like any shell</a:t>
-            </a:r>
-            <a:endParaRPr lang="en-US" sz="1500" dirty="0"/>
-          </a:p>
-        </p:txBody>
-      </p:sp>
-      <p:sp>
-        <p:nvSpPr>
-          <p:cNvPr id="1012" name="Step body 3"/>
-          <p:cNvSpPr txBox="1"/>
-          <p:nvPr/>
-        </p:nvSpPr>
-        <p:spPr>
-          <a:xfrm>
-            <a:off x="8961120" y="4636008"/>
-            <a:ext cx="2743200" cy="1005840"/>
-          </a:xfrm>
-          <a:prstGeom prst="rect">
-            <a:avLst/>
-          </a:prstGeom>
-          <a:noFill/>
-          <a:ln/>
-        </p:spPr>
-        <p:txBody>
-          <a:bodyPr wrap="square" lIns="0" tIns="0" rIns="0" bIns="0" rtlCol="0" anchor="t"/>
-          <a:lstStyle/>
-          <a:p>
-            <a:pPr indent="0" marL="0">
-              <a:buNone/>
-            </a:pPr>
-            <a:r>
-              <a:rPr lang="en-US" sz="1300" dirty="0">
-                <a:solidFill>
-                  <a:schemeClr val="tx1"/>
-                </a:solidFill>
-                <a:latin typeface="Calibri" pitchFamily="34" charset="0"/>
-                <a:ea typeface="Calibri" pitchFamily="34" charset="-122"/>
-                <a:cs typeface="Calibri" pitchFamily="34" charset="-120"/>
-              </a:rPr>
-              <a:t>Keys go to live session. Size shown top-right (95 × 24 here).</a:t>
-            </a:r>
-            <a:endParaRPr lang="en-US" sz="1300" dirty="0"/>
-          </a:p>
-        </p:txBody>
-      </p:sp>
-      <p:sp>
-        <p:nvSpPr>
-          <p:cNvPr id="1013" name="Screenshot source"/>
-          <p:cNvSpPr txBox="1"/>
-          <p:nvPr/>
-        </p:nvSpPr>
-        <p:spPr>
-          <a:xfrm>
-            <a:off x="548640" y="5897880"/>
-            <a:ext cx="11064240" cy="365760"/>
-          </a:xfrm>
-          <a:prstGeom prst="rect">
-            <a:avLst/>
-          </a:prstGeom>
-          <a:noFill/>
-          <a:ln/>
-        </p:spPr>
-        <p:txBody>
-          <a:bodyPr wrap="square" lIns="0" tIns="0" rIns="0" bIns="0" rtlCol="0" anchor="ctr"/>
-          <a:lstStyle/>
-          <a:p>
-            <a:pPr indent="0" marL="0">
-              <a:buNone/>
-            </a:pPr>
-            <a:r>
-              <a:rPr lang="en-US" sz="1100" i="1" dirty="0">
-                <a:solidFill>
-                  <a:srgbClr val="6B6785"/>
-                </a:solidFill>
-                <a:latin typeface="Calibri" pitchFamily="34" charset="0"/>
-                <a:ea typeface="Calibri" pitchFamily="34" charset="-122"/>
-                <a:cs typeface="Calibri" pitchFamily="34" charset="-120"/>
-              </a:rPr>
-              <a:t>Screenshot: guessing-game playground. Source: Aspire blog, “Aspire 13.5: Fresh pixels and better workflows”, Aug 18, 2026.</a:t>
-            </a:r>
-            <a:endParaRPr lang="en-US" sz="1100" dirty="0"/>
           </a:p>
         </p:txBody>
       </p:sp>
@@ -15722,6 +17256,626 @@
 
 <file path=ppt/slides/slide20.xml><?xml version="1.0" encoding="utf-8"?>
 <p:sld xmlns:a="http://schemas.openxmlformats.org/drawingml/2006/main" xmlns:r="http://schemas.openxmlformats.org/officeDocument/2006/relationships" xmlns:p="http://schemas.openxmlformats.org/presentationml/2006/main">
+  <p:cSld name="Slide 19">
+    <p:spTree>
+      <p:nvGrpSpPr>
+        <p:cNvPr id="1" name=""/>
+        <p:cNvGrpSpPr/>
+        <p:nvPr/>
+      </p:nvGrpSpPr>
+      <p:grpSpPr>
+        <a:xfrm>
+          <a:off x="0" y="0"/>
+          <a:ext cx="0" cy="0"/>
+          <a:chOff x="0" y="0"/>
+          <a:chExt cx="0" cy="0"/>
+        </a:xfrm>
+      </p:grpSpPr>
+      <p:sp>
+        <p:nvSpPr>
+          <p:cNvPr id="2" name="Text 0"/>
+          <p:cNvSpPr/>
+          <p:nvPr>
+            <p:ph idx="100" type="title" hasCustomPrompt="1"/>
+          </p:nvPr>
+        </p:nvSpPr>
+        <p:spPr>
+          <a:xfrm>
+            <a:off x="548640" y="320040"/>
+            <a:ext cx="11064240" cy="777240"/>
+          </a:xfrm>
+          <a:prstGeom prst="rect">
+            <a:avLst/>
+          </a:prstGeom>
+          <a:noFill/>
+          <a:ln/>
+        </p:spPr>
+        <p:txBody>
+          <a:bodyPr wrap="square" lIns="0" tIns="0" rIns="0" bIns="0" rtlCol="0" anchor="ctr"/>
+          <a:lstStyle/>
+          <a:p>
+            <a:pPr algn="l" indent="0" marL="0">
+              <a:buNone/>
+            </a:pPr>
+            <a:r>
+              <a:rPr lang="en-US" sz="3400" b="1" dirty="0">
+                <a:solidFill>
+                  <a:schemeClr val="tx2"/>
+                </a:solidFill>
+                <a:latin typeface="Cambria" pitchFamily="34" charset="0"/>
+                <a:ea typeface="Cambria" pitchFamily="34" charset="-122"/>
+                <a:cs typeface="Cambria" pitchFamily="34" charset="-120"/>
+              </a:rPr>
+              <a:t>Terminal view</a:t>
+            </a:r>
+            <a:endParaRPr lang="en-US" sz="3400" dirty="0"/>
+          </a:p>
+        </p:txBody>
+      </p:sp>
+      <p:sp>
+        <p:nvSpPr>
+          <p:cNvPr id="25" name="Slide Number Placeholder 0"/>
+          <p:cNvSpPr>
+            <a:spLocks noGrp="1"/>
+          </p:cNvSpPr>
+          <p:nvPr>
+            <p:ph type="sldNum" sz="quarter" idx="4294967295"/>
+          </p:nvPr>
+        </p:nvSpPr>
+        <p:spPr>
+          <a:xfrm>
+            <a:off x="11155680" y="6446520"/>
+            <a:ext cx="457200" cy="274320"/>
+          </a:xfrm>
+          <a:prstGeom prst="rect">
+            <a:avLst/>
+          </a:prstGeom>
+          <a:extLst>
+            <a:ext uri="{C572A759-6A51-4108-AA02-DFA0A04FC94B}">
+              <ma14:wrappingTextBoxFlag xmlns:ma14="http://schemas.microsoft.com/office/mac/drawingml/2011/main" val="0"/>
+            </a:ext>
+          </a:extLst>
+        </p:spPr>
+        <p:txBody>
+          <a:bodyPr/>
+          <a:lstStyle>
+            <a:lvl1pPr>
+              <a:defRPr sz="1000">
+                <a:solidFill>
+                  <a:schemeClr val="accent6"/>
+                </a:solidFill>
+                <a:latin typeface="Calibri"/>
+                <a:ea typeface="Calibri"/>
+                <a:cs typeface="Calibri"/>
+              </a:defRPr>
+            </a:lvl1pPr>
+          </a:lstStyle>
+          <a:p>
+            <a:pPr algn="r"/>
+            <a:fld id="{F7021451-1387-4CA6-816F-3879F97B5CBC}" type="slidenum">
+              <a:rPr b="0" lang="en-US"/>
+              <a:t>19</a:t>
+            </a:fld>
+            <a:endParaRPr lang="en-US"/>
+          </a:p>
+        </p:txBody>
+      </p:sp>
+      <p:pic>
+        <p:nvPicPr>
+          <p:cNvPr id="26" name="Dashboard screenshot" descr="The Aspire 13.5 dashboard Console logs page showing a live terminal running the guessing-game resource"/>
+          <p:cNvPicPr>
+            <a:picLocks noChangeAspect="1"/>
+          </p:cNvPicPr>
+          <p:nvPr/>
+        </p:nvPicPr>
+        <p:blipFill>
+          <a:blip r:embed="rId3"/>
+          <a:stretch>
+            <a:fillRect/>
+          </a:stretch>
+        </p:blipFill>
+        <p:spPr>
+          <a:xfrm>
+            <a:off x="548640" y="1280160"/>
+            <a:ext cx="7168896" cy="4480560"/>
+          </a:xfrm>
+          <a:prstGeom prst="rect">
+            <a:avLst/>
+          </a:prstGeom>
+          <a:ln w="12700">
+            <a:solidFill>
+              <a:srgbClr val="D9D6E8"/>
+            </a:solidFill>
+          </a:ln>
+        </p:spPr>
+      </p:pic>
+      <p:sp>
+        <p:nvSpPr>
+          <p:cNvPr id="1001" name="Step circle 1"/>
+          <p:cNvSpPr/>
+          <p:nvPr/>
+        </p:nvSpPr>
+        <p:spPr>
+          <a:xfrm>
+            <a:off x="8503920" y="1325880"/>
+            <a:ext cx="347472" cy="347472"/>
+          </a:xfrm>
+          <a:prstGeom prst="ellipse">
+            <a:avLst/>
+          </a:prstGeom>
+          <a:solidFill>
+            <a:schemeClr val="accent1"/>
+          </a:solidFill>
+          <a:ln w="12700">
+            <a:solidFill>
+              <a:schemeClr val="accent1"/>
+            </a:solidFill>
+            <a:prstDash val="solid"/>
+          </a:ln>
+        </p:spPr>
+        <p:txBody>
+          <a:bodyPr/>
+          <a:p/>
+        </p:txBody>
+      </p:sp>
+      <p:sp>
+        <p:nvSpPr>
+          <p:cNvPr id="1002" name="Step number 1"/>
+          <p:cNvSpPr txBox="1"/>
+          <p:nvPr/>
+        </p:nvSpPr>
+        <p:spPr>
+          <a:xfrm>
+            <a:off x="8503920" y="1325880"/>
+            <a:ext cx="347472" cy="347472"/>
+          </a:xfrm>
+          <a:prstGeom prst="rect">
+            <a:avLst/>
+          </a:prstGeom>
+          <a:noFill/>
+          <a:ln/>
+        </p:spPr>
+        <p:txBody>
+          <a:bodyPr wrap="square" lIns="0" tIns="0" rIns="0" bIns="0" rtlCol="0" anchor="ctr"/>
+          <a:lstStyle/>
+          <a:p>
+            <a:pPr algn="ctr" indent="0" marL="0">
+              <a:buNone/>
+            </a:pPr>
+            <a:r>
+              <a:rPr lang="en-US" sz="1400" b="1" dirty="0">
+                <a:solidFill>
+                  <a:schemeClr val="bg1"/>
+                </a:solidFill>
+                <a:latin typeface="Calibri" pitchFamily="34" charset="0"/>
+                <a:ea typeface="Calibri" pitchFamily="34" charset="-122"/>
+                <a:cs typeface="Calibri" pitchFamily="34" charset="-120"/>
+              </a:rPr>
+              <a:t>1</a:t>
+            </a:r>
+            <a:endParaRPr lang="en-US" sz="1400" dirty="0"/>
+          </a:p>
+        </p:txBody>
+      </p:sp>
+      <p:sp>
+        <p:nvSpPr>
+          <p:cNvPr id="1003" name="Step title 1"/>
+          <p:cNvSpPr txBox="1"/>
+          <p:nvPr/>
+        </p:nvSpPr>
+        <p:spPr>
+          <a:xfrm>
+            <a:off x="8961120" y="1325880"/>
+            <a:ext cx="2743200" cy="347472"/>
+          </a:xfrm>
+          <a:prstGeom prst="rect">
+            <a:avLst/>
+          </a:prstGeom>
+          <a:noFill/>
+          <a:ln/>
+        </p:spPr>
+        <p:txBody>
+          <a:bodyPr wrap="square" lIns="0" tIns="0" rIns="0" bIns="0" rtlCol="0" anchor="ctr"/>
+          <a:lstStyle/>
+          <a:p>
+            <a:pPr indent="0" marL="0">
+              <a:buNone/>
+            </a:pPr>
+            <a:r>
+              <a:rPr lang="en-US" sz="1500" b="1" dirty="0">
+                <a:solidFill>
+                  <a:schemeClr val="tx2"/>
+                </a:solidFill>
+                <a:latin typeface="Calibri" pitchFamily="34" charset="0"/>
+                <a:ea typeface="Calibri" pitchFamily="34" charset="-122"/>
+                <a:cs typeface="Calibri" pitchFamily="34" charset="-120"/>
+              </a:rPr>
+              <a:t>Open Console logs</a:t>
+            </a:r>
+            <a:endParaRPr lang="en-US" sz="1500" dirty="0"/>
+          </a:p>
+        </p:txBody>
+      </p:sp>
+      <p:sp>
+        <p:nvSpPr>
+          <p:cNvPr id="1004" name="Step body 1"/>
+          <p:cNvSpPr txBox="1"/>
+          <p:nvPr/>
+        </p:nvSpPr>
+        <p:spPr>
+          <a:xfrm>
+            <a:off x="8961120" y="1709928"/>
+            <a:ext cx="2743200" cy="1005840"/>
+          </a:xfrm>
+          <a:prstGeom prst="rect">
+            <a:avLst/>
+          </a:prstGeom>
+          <a:noFill/>
+          <a:ln/>
+        </p:spPr>
+        <p:txBody>
+          <a:bodyPr wrap="square" lIns="0" tIns="0" rIns="0" bIns="0" rtlCol="0" anchor="t"/>
+          <a:lstStyle/>
+          <a:p>
+            <a:pPr indent="0" marL="0">
+              <a:buNone/>
+            </a:pPr>
+            <a:r>
+              <a:rPr lang="en-US" sz="1300" dirty="0">
+                <a:solidFill>
+                  <a:schemeClr val="tx1"/>
+                </a:solidFill>
+                <a:latin typeface="Calibri" pitchFamily="34" charset="0"/>
+                <a:ea typeface="Calibri" pitchFamily="34" charset="-122"/>
+                <a:cs typeface="Calibri" pitchFamily="34" charset="-120"/>
+              </a:rPr>
+              <a:t>Pick resource from Resource dropdown (here: guessing-game).</a:t>
+            </a:r>
+            <a:endParaRPr lang="en-US" sz="1300" dirty="0"/>
+          </a:p>
+        </p:txBody>
+      </p:sp>
+      <p:sp>
+        <p:nvSpPr>
+          <p:cNvPr id="1005" name="Step circle 2"/>
+          <p:cNvSpPr/>
+          <p:nvPr/>
+        </p:nvSpPr>
+        <p:spPr>
+          <a:xfrm>
+            <a:off x="8503920" y="2788920"/>
+            <a:ext cx="347472" cy="347472"/>
+          </a:xfrm>
+          <a:prstGeom prst="ellipse">
+            <a:avLst/>
+          </a:prstGeom>
+          <a:solidFill>
+            <a:schemeClr val="accent1"/>
+          </a:solidFill>
+          <a:ln w="12700">
+            <a:solidFill>
+              <a:schemeClr val="accent1"/>
+            </a:solidFill>
+            <a:prstDash val="solid"/>
+          </a:ln>
+        </p:spPr>
+        <p:txBody>
+          <a:bodyPr/>
+          <a:p/>
+        </p:txBody>
+      </p:sp>
+      <p:sp>
+        <p:nvSpPr>
+          <p:cNvPr id="1006" name="Step number 2"/>
+          <p:cNvSpPr txBox="1"/>
+          <p:nvPr/>
+        </p:nvSpPr>
+        <p:spPr>
+          <a:xfrm>
+            <a:off x="8503920" y="2788920"/>
+            <a:ext cx="347472" cy="347472"/>
+          </a:xfrm>
+          <a:prstGeom prst="rect">
+            <a:avLst/>
+          </a:prstGeom>
+          <a:noFill/>
+          <a:ln/>
+        </p:spPr>
+        <p:txBody>
+          <a:bodyPr wrap="square" lIns="0" tIns="0" rIns="0" bIns="0" rtlCol="0" anchor="ctr"/>
+          <a:lstStyle/>
+          <a:p>
+            <a:pPr algn="ctr" indent="0" marL="0">
+              <a:buNone/>
+            </a:pPr>
+            <a:r>
+              <a:rPr lang="en-US" sz="1400" b="1" dirty="0">
+                <a:solidFill>
+                  <a:schemeClr val="bg1"/>
+                </a:solidFill>
+                <a:latin typeface="Calibri" pitchFamily="34" charset="0"/>
+                <a:ea typeface="Calibri" pitchFamily="34" charset="-122"/>
+                <a:cs typeface="Calibri" pitchFamily="34" charset="-120"/>
+              </a:rPr>
+              <a:t>2</a:t>
+            </a:r>
+            <a:endParaRPr lang="en-US" sz="1400" dirty="0"/>
+          </a:p>
+        </p:txBody>
+      </p:sp>
+      <p:sp>
+        <p:nvSpPr>
+          <p:cNvPr id="1007" name="Step title 2"/>
+          <p:cNvSpPr txBox="1"/>
+          <p:nvPr/>
+        </p:nvSpPr>
+        <p:spPr>
+          <a:xfrm>
+            <a:off x="8961120" y="2788920"/>
+            <a:ext cx="2743200" cy="347472"/>
+          </a:xfrm>
+          <a:prstGeom prst="rect">
+            <a:avLst/>
+          </a:prstGeom>
+          <a:noFill/>
+          <a:ln/>
+        </p:spPr>
+        <p:txBody>
+          <a:bodyPr wrap="square" lIns="0" tIns="0" rIns="0" bIns="0" rtlCol="0" anchor="ctr"/>
+          <a:lstStyle/>
+          <a:p>
+            <a:pPr indent="0" marL="0">
+              <a:buNone/>
+            </a:pPr>
+            <a:r>
+              <a:rPr lang="en-US" sz="1500" b="1" dirty="0">
+                <a:solidFill>
+                  <a:schemeClr val="tx2"/>
+                </a:solidFill>
+                <a:latin typeface="Calibri" pitchFamily="34" charset="0"/>
+                <a:ea typeface="Calibri" pitchFamily="34" charset="-122"/>
+                <a:cs typeface="Calibri" pitchFamily="34" charset="-120"/>
+              </a:rPr>
+              <a:t>Live terminal shows</a:t>
+            </a:r>
+            <a:endParaRPr lang="en-US" sz="1500" dirty="0"/>
+          </a:p>
+        </p:txBody>
+      </p:sp>
+      <p:sp>
+        <p:nvSpPr>
+          <p:cNvPr id="1008" name="Step body 2"/>
+          <p:cNvSpPr txBox="1"/>
+          <p:nvPr/>
+        </p:nvSpPr>
+        <p:spPr>
+          <a:xfrm>
+            <a:off x="8961120" y="3172968"/>
+            <a:ext cx="2743200" cy="1005840"/>
+          </a:xfrm>
+          <a:prstGeom prst="rect">
+            <a:avLst/>
+          </a:prstGeom>
+          <a:noFill/>
+          <a:ln/>
+        </p:spPr>
+        <p:txBody>
+          <a:bodyPr wrap="square" lIns="0" tIns="0" rIns="0" bIns="0" rtlCol="0" anchor="t"/>
+          <a:lstStyle/>
+          <a:p>
+            <a:pPr indent="0" marL="0">
+              <a:buNone/>
+            </a:pPr>
+            <a:r>
+              <a:rPr lang="en-US" sz="1300" dirty="0">
+                <a:solidFill>
+                  <a:schemeClr val="tx1"/>
+                </a:solidFill>
+                <a:latin typeface="Calibri" pitchFamily="34" charset="0"/>
+                <a:ea typeface="Calibri" pitchFamily="34" charset="-122"/>
+                <a:cs typeface="Calibri" pitchFamily="34" charset="-120"/>
+              </a:rPr>
+              <a:t>Resource with WithTerminal() gets interactive session. Switch replicas or back to logs without stopping it.</a:t>
+            </a:r>
+            <a:endParaRPr lang="en-US" sz="1300" dirty="0"/>
+          </a:p>
+        </p:txBody>
+      </p:sp>
+      <p:sp>
+        <p:nvSpPr>
+          <p:cNvPr id="1009" name="Step circle 3"/>
+          <p:cNvSpPr/>
+          <p:nvPr/>
+        </p:nvSpPr>
+        <p:spPr>
+          <a:xfrm>
+            <a:off x="8503920" y="4251960"/>
+            <a:ext cx="347472" cy="347472"/>
+          </a:xfrm>
+          <a:prstGeom prst="ellipse">
+            <a:avLst/>
+          </a:prstGeom>
+          <a:solidFill>
+            <a:schemeClr val="accent1"/>
+          </a:solidFill>
+          <a:ln w="12700">
+            <a:solidFill>
+              <a:schemeClr val="accent1"/>
+            </a:solidFill>
+            <a:prstDash val="solid"/>
+          </a:ln>
+        </p:spPr>
+        <p:txBody>
+          <a:bodyPr/>
+          <a:p/>
+        </p:txBody>
+      </p:sp>
+      <p:sp>
+        <p:nvSpPr>
+          <p:cNvPr id="1010" name="Step number 3"/>
+          <p:cNvSpPr txBox="1"/>
+          <p:nvPr/>
+        </p:nvSpPr>
+        <p:spPr>
+          <a:xfrm>
+            <a:off x="8503920" y="4251960"/>
+            <a:ext cx="347472" cy="347472"/>
+          </a:xfrm>
+          <a:prstGeom prst="rect">
+            <a:avLst/>
+          </a:prstGeom>
+          <a:noFill/>
+          <a:ln/>
+        </p:spPr>
+        <p:txBody>
+          <a:bodyPr wrap="square" lIns="0" tIns="0" rIns="0" bIns="0" rtlCol="0" anchor="ctr"/>
+          <a:lstStyle/>
+          <a:p>
+            <a:pPr algn="ctr" indent="0" marL="0">
+              <a:buNone/>
+            </a:pPr>
+            <a:r>
+              <a:rPr lang="en-US" sz="1400" b="1" dirty="0">
+                <a:solidFill>
+                  <a:schemeClr val="bg1"/>
+                </a:solidFill>
+                <a:latin typeface="Calibri" pitchFamily="34" charset="0"/>
+                <a:ea typeface="Calibri" pitchFamily="34" charset="-122"/>
+                <a:cs typeface="Calibri" pitchFamily="34" charset="-120"/>
+              </a:rPr>
+              <a:t>3</a:t>
+            </a:r>
+            <a:endParaRPr lang="en-US" sz="1400" dirty="0"/>
+          </a:p>
+        </p:txBody>
+      </p:sp>
+      <p:sp>
+        <p:nvSpPr>
+          <p:cNvPr id="1011" name="Step title 3"/>
+          <p:cNvSpPr txBox="1"/>
+          <p:nvPr/>
+        </p:nvSpPr>
+        <p:spPr>
+          <a:xfrm>
+            <a:off x="8961120" y="4251960"/>
+            <a:ext cx="2743200" cy="347472"/>
+          </a:xfrm>
+          <a:prstGeom prst="rect">
+            <a:avLst/>
+          </a:prstGeom>
+          <a:noFill/>
+          <a:ln/>
+        </p:spPr>
+        <p:txBody>
+          <a:bodyPr wrap="square" lIns="0" tIns="0" rIns="0" bIns="0" rtlCol="0" anchor="ctr"/>
+          <a:lstStyle/>
+          <a:p>
+            <a:pPr indent="0" marL="0">
+              <a:buNone/>
+            </a:pPr>
+            <a:r>
+              <a:rPr lang="en-US" sz="1500" b="1" dirty="0">
+                <a:solidFill>
+                  <a:schemeClr val="tx2"/>
+                </a:solidFill>
+                <a:latin typeface="Calibri" pitchFamily="34" charset="0"/>
+                <a:ea typeface="Calibri" pitchFamily="34" charset="-122"/>
+                <a:cs typeface="Calibri" pitchFamily="34" charset="-120"/>
+              </a:rPr>
+              <a:t>Type like any shell</a:t>
+            </a:r>
+            <a:endParaRPr lang="en-US" sz="1500" dirty="0"/>
+          </a:p>
+        </p:txBody>
+      </p:sp>
+      <p:sp>
+        <p:nvSpPr>
+          <p:cNvPr id="1012" name="Step body 3"/>
+          <p:cNvSpPr txBox="1"/>
+          <p:nvPr/>
+        </p:nvSpPr>
+        <p:spPr>
+          <a:xfrm>
+            <a:off x="8961120" y="4636008"/>
+            <a:ext cx="2743200" cy="1005840"/>
+          </a:xfrm>
+          <a:prstGeom prst="rect">
+            <a:avLst/>
+          </a:prstGeom>
+          <a:noFill/>
+          <a:ln/>
+        </p:spPr>
+        <p:txBody>
+          <a:bodyPr wrap="square" lIns="0" tIns="0" rIns="0" bIns="0" rtlCol="0" anchor="t"/>
+          <a:lstStyle/>
+          <a:p>
+            <a:pPr indent="0" marL="0">
+              <a:buNone/>
+            </a:pPr>
+            <a:r>
+              <a:rPr lang="en-US" sz="1300" dirty="0">
+                <a:solidFill>
+                  <a:schemeClr val="tx1"/>
+                </a:solidFill>
+                <a:latin typeface="Calibri" pitchFamily="34" charset="0"/>
+                <a:ea typeface="Calibri" pitchFamily="34" charset="-122"/>
+                <a:cs typeface="Calibri" pitchFamily="34" charset="-120"/>
+              </a:rPr>
+              <a:t>Keys go to live session. Size shown top-right (95 × 24 here).</a:t>
+            </a:r>
+            <a:endParaRPr lang="en-US" sz="1300" dirty="0"/>
+          </a:p>
+        </p:txBody>
+      </p:sp>
+      <p:sp>
+        <p:nvSpPr>
+          <p:cNvPr id="1013" name="Screenshot source"/>
+          <p:cNvSpPr txBox="1"/>
+          <p:nvPr/>
+        </p:nvSpPr>
+        <p:spPr>
+          <a:xfrm>
+            <a:off x="548640" y="5897880"/>
+            <a:ext cx="11064240" cy="365760"/>
+          </a:xfrm>
+          <a:prstGeom prst="rect">
+            <a:avLst/>
+          </a:prstGeom>
+          <a:noFill/>
+          <a:ln/>
+        </p:spPr>
+        <p:txBody>
+          <a:bodyPr wrap="square" lIns="0" tIns="0" rIns="0" bIns="0" rtlCol="0" anchor="ctr"/>
+          <a:lstStyle/>
+          <a:p>
+            <a:pPr indent="0" marL="0">
+              <a:buNone/>
+            </a:pPr>
+            <a:r>
+              <a:rPr lang="en-US" sz="1100" i="1" dirty="0">
+                <a:solidFill>
+                  <a:srgbClr val="6B6785"/>
+                </a:solidFill>
+                <a:latin typeface="Calibri" pitchFamily="34" charset="0"/>
+                <a:ea typeface="Calibri" pitchFamily="34" charset="-122"/>
+                <a:cs typeface="Calibri" pitchFamily="34" charset="-120"/>
+              </a:rPr>
+              <a:t>Screenshot: guessing-game playground. Source: Aspire blog, “Aspire 13.5: Fresh pixels and better workflows”, Aug 18, 2026.</a:t>
+            </a:r>
+            <a:endParaRPr lang="en-US" sz="1100" dirty="0"/>
+          </a:p>
+        </p:txBody>
+      </p:sp>
+    </p:spTree>
+  </p:cSld>
+  <p:clrMapOvr>
+    <a:masterClrMapping/>
+  </p:clrMapOvr>
+</p:sld>
+</file>
+
+<file path=ppt/slides/slide21.xml><?xml version="1.0" encoding="utf-8"?>
+<p:sld xmlns:a="http://schemas.openxmlformats.org/drawingml/2006/main" xmlns:r="http://schemas.openxmlformats.org/officeDocument/2006/relationships" xmlns:p="http://schemas.openxmlformats.org/presentationml/2006/main">
   <p:cSld name="Slide 20">
     <p:spTree>
       <p:nvGrpSpPr>
@@ -16939,7 +19093,7 @@
 </p:sld>
 </file>
 
-<file path=ppt/slides/slide21.xml><?xml version="1.0" encoding="utf-8"?>
+<file path=ppt/slides/slide22.xml><?xml version="1.0" encoding="utf-8"?>
 <p:sld xmlns:a="http://schemas.openxmlformats.org/drawingml/2006/main" xmlns:r="http://schemas.openxmlformats.org/officeDocument/2006/relationships" xmlns:p="http://schemas.openxmlformats.org/presentationml/2006/main">
   <p:cSld name="Slide 21">
     <p:spTree>
@@ -19822,7 +21976,7 @@
 </p:sld>
 </file>
 
-<file path=ppt/slides/slide22.xml><?xml version="1.0" encoding="utf-8"?>
+<file path=ppt/slides/slide23.xml><?xml version="1.0" encoding="utf-8"?>
 <p:sld xmlns:a="http://schemas.openxmlformats.org/drawingml/2006/main" xmlns:r="http://schemas.openxmlformats.org/officeDocument/2006/relationships" xmlns:p="http://schemas.openxmlformats.org/presentationml/2006/main">
   <p:cSld name="Slide 22">
     <p:spTree>
@@ -20442,7 +22596,7 @@
 </p:sld>
 </file>
 
-<file path=ppt/slides/slide23.xml><?xml version="1.0" encoding="utf-8"?>
+<file path=ppt/slides/slide24.xml><?xml version="1.0" encoding="utf-8"?>
 <p:sld xmlns:a="http://schemas.openxmlformats.org/drawingml/2006/main" xmlns:r="http://schemas.openxmlformats.org/officeDocument/2006/relationships" xmlns:p="http://schemas.openxmlformats.org/presentationml/2006/main">
   <p:cSld name="Slide 23">
     <p:spTree>
@@ -23608,7 +25762,7 @@
 </p:sld>
 </file>
 
-<file path=ppt/slides/slide24.xml><?xml version="1.0" encoding="utf-8"?>
+<file path=ppt/slides/slide25.xml><?xml version="1.0" encoding="utf-8"?>
 <p:sld xmlns:a="http://schemas.openxmlformats.org/drawingml/2006/main" xmlns:r="http://schemas.openxmlformats.org/officeDocument/2006/relationships" xmlns:p="http://schemas.openxmlformats.org/presentationml/2006/main">
   <p:cSld name="Slide 24">
     <p:spTree>
@@ -24228,7 +26382,7 @@
 </p:sld>
 </file>
 
-<file path=ppt/slides/slide25.xml><?xml version="1.0" encoding="utf-8"?>
+<file path=ppt/slides/slide26.xml><?xml version="1.0" encoding="utf-8"?>
 <p:sld xmlns:a="http://schemas.openxmlformats.org/drawingml/2006/main" xmlns:r="http://schemas.openxmlformats.org/officeDocument/2006/relationships" xmlns:p="http://schemas.openxmlformats.org/presentationml/2006/main">
   <p:cSld name="Slide 25">
     <p:spTree>
@@ -25657,7 +27811,7 @@
 </p:sld>
 </file>
 
-<file path=ppt/slides/slide26.xml><?xml version="1.0" encoding="utf-8"?>
+<file path=ppt/slides/slide27.xml><?xml version="1.0" encoding="utf-8"?>
 <p:sld xmlns:a="http://schemas.openxmlformats.org/drawingml/2006/main" xmlns:r="http://schemas.openxmlformats.org/officeDocument/2006/relationships" xmlns:p="http://schemas.openxmlformats.org/presentationml/2006/main">
   <p:cSld name="Slide 26">
     <p:spTree>
@@ -26277,7 +28431,7 @@
 </p:sld>
 </file>
 
-<file path=ppt/slides/slide27.xml><?xml version="1.0" encoding="utf-8"?>
+<file path=ppt/slides/slide28.xml><?xml version="1.0" encoding="utf-8"?>
 <p:sld xmlns:a="http://schemas.openxmlformats.org/drawingml/2006/main" xmlns:r="http://schemas.openxmlformats.org/officeDocument/2006/relationships" xmlns:p="http://schemas.openxmlformats.org/presentationml/2006/main">
   <p:cSld name="Slide 27">
     <p:spTree>
@@ -28317,7 +30471,7 @@
 </p:sld>
 </file>
 
-<file path=ppt/slides/slide28.xml><?xml version="1.0" encoding="utf-8"?>
+<file path=ppt/slides/slide29.xml><?xml version="1.0" encoding="utf-8"?>
 <p:sld xmlns:a="http://schemas.openxmlformats.org/drawingml/2006/main" xmlns:r="http://schemas.openxmlformats.org/officeDocument/2006/relationships" xmlns:p="http://schemas.openxmlformats.org/presentationml/2006/main">
   <p:cSld name="Slide 28">
     <p:spTree>
@@ -28926,178 +31080,6 @@
               <a:t>Frame from 13.5 blog demo video. Sample command “Deploy application”, not our Echo code.</a:t>
             </a:r>
             <a:endParaRPr lang="en-US" sz="1100" dirty="0"/>
-          </a:p>
-        </p:txBody>
-      </p:sp>
-    </p:spTree>
-  </p:cSld>
-  <p:clrMapOvr>
-    <a:masterClrMapping/>
-  </p:clrMapOvr>
-</p:sld>
-</file>
-
-<file path=ppt/slides/slide29.xml><?xml version="1.0" encoding="utf-8"?>
-<p:sld xmlns:a="http://schemas.openxmlformats.org/drawingml/2006/main" xmlns:r="http://schemas.openxmlformats.org/officeDocument/2006/relationships" xmlns:p="http://schemas.openxmlformats.org/presentationml/2006/main">
-  <p:cSld name="Slide 29">
-    <p:spTree>
-      <p:nvGrpSpPr>
-        <p:cNvPr id="1" name=""/>
-        <p:cNvGrpSpPr/>
-        <p:nvPr/>
-      </p:nvGrpSpPr>
-      <p:grpSpPr>
-        <a:xfrm>
-          <a:off x="0" y="0"/>
-          <a:ext cx="0" cy="0"/>
-          <a:chOff x="0" y="0"/>
-          <a:chExt cx="0" cy="0"/>
-        </a:xfrm>
-      </p:grpSpPr>
-      <p:sp>
-        <p:nvSpPr>
-          <p:cNvPr id="2" name="Part label"/>
-          <p:cNvSpPr txBox="1"/>
-          <p:nvPr/>
-        </p:nvSpPr>
-        <p:spPr>
-          <a:xfrm>
-            <a:off x="822960" y="2103120"/>
-            <a:ext cx="3657600" cy="457200"/>
-          </a:xfrm>
-          <a:prstGeom prst="rect">
-            <a:avLst/>
-          </a:prstGeom>
-          <a:noFill/>
-          <a:ln/>
-        </p:spPr>
-        <p:txBody>
-          <a:bodyPr wrap="square" lIns="0" tIns="0" rIns="0" bIns="0" rtlCol="0" anchor="ctr"/>
-          <a:lstStyle/>
-          <a:p>
-            <a:pPr indent="0" marL="0">
-              <a:buNone/>
-            </a:pPr>
-            <a:r>
-              <a:rPr lang="en-US" sz="1600" b="1" spc="400" kern="0" dirty="0">
-                <a:solidFill>
-                  <a:srgbClr val="A78BFA"/>
-                </a:solidFill>
-              </a:rPr>
-              <a:t>PART 4</a:t>
-            </a:r>
-            <a:endParaRPr lang="en-US" sz="1600" dirty="0"/>
-          </a:p>
-        </p:txBody>
-      </p:sp>
-      <p:sp>
-        <p:nvSpPr>
-          <p:cNvPr id="3" name="Part rule"/>
-          <p:cNvSpPr/>
-          <p:nvPr/>
-        </p:nvSpPr>
-        <p:spPr>
-          <a:xfrm>
-            <a:off x="822960" y="2560320"/>
-            <a:ext cx="1097280" cy="54864"/>
-          </a:xfrm>
-          <a:prstGeom prst="rect">
-            <a:avLst/>
-          </a:prstGeom>
-          <a:solidFill>
-            <a:srgbClr val="A78BFA"/>
-          </a:solidFill>
-          <a:ln w="12700">
-            <a:solidFill>
-              <a:srgbClr val="A78BFA"/>
-            </a:solidFill>
-            <a:prstDash val="solid"/>
-          </a:ln>
-        </p:spPr>
-        <p:txBody>
-          <a:bodyPr/>
-          <a:p/>
-        </p:txBody>
-      </p:sp>
-      <p:sp>
-        <p:nvSpPr>
-          <p:cNvPr id="4" name="Text 0"/>
-          <p:cNvSpPr/>
-          <p:nvPr>
-            <p:ph idx="100" type="title" hasCustomPrompt="1"/>
-          </p:nvPr>
-        </p:nvSpPr>
-        <p:spPr>
-          <a:xfrm>
-            <a:off x="822960" y="2651760"/>
-            <a:ext cx="10515600" cy="1097280"/>
-          </a:xfrm>
-          <a:prstGeom prst="rect">
-            <a:avLst/>
-          </a:prstGeom>
-          <a:noFill/>
-          <a:ln/>
-        </p:spPr>
-        <p:txBody>
-          <a:bodyPr wrap="square" lIns="0" tIns="0" rIns="0" bIns="0" rtlCol="0" anchor="ctr"/>
-          <a:lstStyle/>
-          <a:p>
-            <a:pPr algn="l" indent="0" marL="0">
-              <a:buNone/>
-            </a:pPr>
-            <a:r>
-              <a:rPr lang="en-US" sz="4400" b="1" dirty="0">
-                <a:solidFill>
-                  <a:schemeClr val="bg1"/>
-                </a:solidFill>
-                <a:latin typeface="Cambria" pitchFamily="34" charset="0"/>
-                <a:ea typeface="Cambria" pitchFamily="34" charset="-122"/>
-                <a:cs typeface="Cambria" pitchFamily="34" charset="-120"/>
-              </a:rPr>
-              <a:t>Wrap-up</a:t>
-            </a:r>
-            <a:endParaRPr lang="en-US" sz="4400" dirty="0"/>
-          </a:p>
-        </p:txBody>
-      </p:sp>
-      <p:sp>
-        <p:nvSpPr>
-          <p:cNvPr id="5" name="Text 0"/>
-          <p:cNvSpPr/>
-          <p:nvPr>
-            <p:ph idx="101" type="body" hasCustomPrompt="1"/>
-          </p:nvPr>
-        </p:nvSpPr>
-        <p:spPr>
-          <a:xfrm>
-            <a:off x="822960" y="3794760"/>
-            <a:ext cx="10058400" cy="914400"/>
-          </a:xfrm>
-          <a:prstGeom prst="rect">
-            <a:avLst/>
-          </a:prstGeom>
-          <a:noFill/>
-          <a:ln/>
-        </p:spPr>
-        <p:txBody>
-          <a:bodyPr wrap="square" lIns="0" tIns="0" rIns="0" bIns="0" rtlCol="0" anchor="t"/>
-          <a:lstStyle/>
-          <a:p>
-            <a:pPr algn="l" indent="0" marL="0">
-              <a:buNone/>
-            </a:pPr>
-            <a:r>
-              <a:rPr lang="en-US" sz="2000" dirty="0">
-                <a:solidFill>
-                  <a:srgbClr val="D9CCFF"/>
-                </a:solidFill>
-                <a:latin typeface="Calibri" pitchFamily="34" charset="0"/>
-                <a:ea typeface="Calibri" pitchFamily="34" charset="-122"/>
-                <a:cs typeface="Calibri" pitchFamily="34" charset="-120"/>
-              </a:rPr>
-              <a:t>Upgrade, languages, links</a:t>
-            </a:r>
-            <a:endParaRPr lang="en-US" sz="2000" dirty="0"/>
           </a:p>
         </p:txBody>
       </p:sp>
@@ -29283,6 +31265,178 @@
 
 <file path=ppt/slides/slide30.xml><?xml version="1.0" encoding="utf-8"?>
 <p:sld xmlns:a="http://schemas.openxmlformats.org/drawingml/2006/main" xmlns:r="http://schemas.openxmlformats.org/officeDocument/2006/relationships" xmlns:p="http://schemas.openxmlformats.org/presentationml/2006/main">
+  <p:cSld name="Slide 29">
+    <p:spTree>
+      <p:nvGrpSpPr>
+        <p:cNvPr id="1" name=""/>
+        <p:cNvGrpSpPr/>
+        <p:nvPr/>
+      </p:nvGrpSpPr>
+      <p:grpSpPr>
+        <a:xfrm>
+          <a:off x="0" y="0"/>
+          <a:ext cx="0" cy="0"/>
+          <a:chOff x="0" y="0"/>
+          <a:chExt cx="0" cy="0"/>
+        </a:xfrm>
+      </p:grpSpPr>
+      <p:sp>
+        <p:nvSpPr>
+          <p:cNvPr id="2" name="Part label"/>
+          <p:cNvSpPr txBox="1"/>
+          <p:nvPr/>
+        </p:nvSpPr>
+        <p:spPr>
+          <a:xfrm>
+            <a:off x="822960" y="2103120"/>
+            <a:ext cx="3657600" cy="457200"/>
+          </a:xfrm>
+          <a:prstGeom prst="rect">
+            <a:avLst/>
+          </a:prstGeom>
+          <a:noFill/>
+          <a:ln/>
+        </p:spPr>
+        <p:txBody>
+          <a:bodyPr wrap="square" lIns="0" tIns="0" rIns="0" bIns="0" rtlCol="0" anchor="ctr"/>
+          <a:lstStyle/>
+          <a:p>
+            <a:pPr indent="0" marL="0">
+              <a:buNone/>
+            </a:pPr>
+            <a:r>
+              <a:rPr lang="en-US" sz="1600" b="1" spc="400" kern="0" dirty="0">
+                <a:solidFill>
+                  <a:srgbClr val="A78BFA"/>
+                </a:solidFill>
+              </a:rPr>
+              <a:t>PART 4</a:t>
+            </a:r>
+            <a:endParaRPr lang="en-US" sz="1600" dirty="0"/>
+          </a:p>
+        </p:txBody>
+      </p:sp>
+      <p:sp>
+        <p:nvSpPr>
+          <p:cNvPr id="3" name="Part rule"/>
+          <p:cNvSpPr/>
+          <p:nvPr/>
+        </p:nvSpPr>
+        <p:spPr>
+          <a:xfrm>
+            <a:off x="822960" y="2560320"/>
+            <a:ext cx="1097280" cy="54864"/>
+          </a:xfrm>
+          <a:prstGeom prst="rect">
+            <a:avLst/>
+          </a:prstGeom>
+          <a:solidFill>
+            <a:srgbClr val="A78BFA"/>
+          </a:solidFill>
+          <a:ln w="12700">
+            <a:solidFill>
+              <a:srgbClr val="A78BFA"/>
+            </a:solidFill>
+            <a:prstDash val="solid"/>
+          </a:ln>
+        </p:spPr>
+        <p:txBody>
+          <a:bodyPr/>
+          <a:p/>
+        </p:txBody>
+      </p:sp>
+      <p:sp>
+        <p:nvSpPr>
+          <p:cNvPr id="4" name="Text 0"/>
+          <p:cNvSpPr/>
+          <p:nvPr>
+            <p:ph idx="100" type="title" hasCustomPrompt="1"/>
+          </p:nvPr>
+        </p:nvSpPr>
+        <p:spPr>
+          <a:xfrm>
+            <a:off x="822960" y="2651760"/>
+            <a:ext cx="10515600" cy="1097280"/>
+          </a:xfrm>
+          <a:prstGeom prst="rect">
+            <a:avLst/>
+          </a:prstGeom>
+          <a:noFill/>
+          <a:ln/>
+        </p:spPr>
+        <p:txBody>
+          <a:bodyPr wrap="square" lIns="0" tIns="0" rIns="0" bIns="0" rtlCol="0" anchor="ctr"/>
+          <a:lstStyle/>
+          <a:p>
+            <a:pPr algn="l" indent="0" marL="0">
+              <a:buNone/>
+            </a:pPr>
+            <a:r>
+              <a:rPr lang="en-US" sz="4400" b="1" dirty="0">
+                <a:solidFill>
+                  <a:schemeClr val="bg1"/>
+                </a:solidFill>
+                <a:latin typeface="Cambria" pitchFamily="34" charset="0"/>
+                <a:ea typeface="Cambria" pitchFamily="34" charset="-122"/>
+                <a:cs typeface="Cambria" pitchFamily="34" charset="-120"/>
+              </a:rPr>
+              <a:t>Wrap-up</a:t>
+            </a:r>
+            <a:endParaRPr lang="en-US" sz="4400" dirty="0"/>
+          </a:p>
+        </p:txBody>
+      </p:sp>
+      <p:sp>
+        <p:nvSpPr>
+          <p:cNvPr id="5" name="Text 0"/>
+          <p:cNvSpPr/>
+          <p:nvPr>
+            <p:ph idx="101" type="body" hasCustomPrompt="1"/>
+          </p:nvPr>
+        </p:nvSpPr>
+        <p:spPr>
+          <a:xfrm>
+            <a:off x="822960" y="3794760"/>
+            <a:ext cx="10058400" cy="914400"/>
+          </a:xfrm>
+          <a:prstGeom prst="rect">
+            <a:avLst/>
+          </a:prstGeom>
+          <a:noFill/>
+          <a:ln/>
+        </p:spPr>
+        <p:txBody>
+          <a:bodyPr wrap="square" lIns="0" tIns="0" rIns="0" bIns="0" rtlCol="0" anchor="t"/>
+          <a:lstStyle/>
+          <a:p>
+            <a:pPr algn="l" indent="0" marL="0">
+              <a:buNone/>
+            </a:pPr>
+            <a:r>
+              <a:rPr lang="en-US" sz="2000" dirty="0">
+                <a:solidFill>
+                  <a:srgbClr val="D9CCFF"/>
+                </a:solidFill>
+                <a:latin typeface="Calibri" pitchFamily="34" charset="0"/>
+                <a:ea typeface="Calibri" pitchFamily="34" charset="-122"/>
+                <a:cs typeface="Calibri" pitchFamily="34" charset="-120"/>
+              </a:rPr>
+              <a:t>Upgrade, languages, links</a:t>
+            </a:r>
+            <a:endParaRPr lang="en-US" sz="2000" dirty="0"/>
+          </a:p>
+        </p:txBody>
+      </p:sp>
+    </p:spTree>
+  </p:cSld>
+  <p:clrMapOvr>
+    <a:masterClrMapping/>
+  </p:clrMapOvr>
+</p:sld>
+</file>
+
+<file path=ppt/slides/slide31.xml><?xml version="1.0" encoding="utf-8"?>
+<p:sld xmlns:a="http://schemas.openxmlformats.org/drawingml/2006/main" xmlns:r="http://schemas.openxmlformats.org/officeDocument/2006/relationships" xmlns:p="http://schemas.openxmlformats.org/presentationml/2006/main">
   <p:cSld name="Slide 30">
     <p:spTree>
       <p:nvGrpSpPr>
@@ -30200,7 +32354,7 @@
 </p:sld>
 </file>
 
-<file path=ppt/slides/slide31.xml><?xml version="1.0" encoding="utf-8"?>
+<file path=ppt/slides/slide32.xml><?xml version="1.0" encoding="utf-8"?>
 <p:sld xmlns:a="http://schemas.openxmlformats.org/drawingml/2006/main" xmlns:r="http://schemas.openxmlformats.org/officeDocument/2006/relationships" xmlns:p="http://schemas.openxmlformats.org/presentationml/2006/main">
   <p:cSld name="Slide 31">
     <p:spTree>
@@ -31113,7 +33267,7 @@
 </p:sld>
 </file>
 
-<file path=ppt/slides/slide32.xml><?xml version="1.0" encoding="utf-8"?>
+<file path=ppt/slides/slide33.xml><?xml version="1.0" encoding="utf-8"?>
 <p:sld xmlns:a="http://schemas.openxmlformats.org/drawingml/2006/main" xmlns:r="http://schemas.openxmlformats.org/officeDocument/2006/relationships" xmlns:p="http://schemas.openxmlformats.org/presentationml/2006/main">
   <p:cSld name="Slide 32">
     <p:spTree>
